--- a/Final/Figures/Afigure.pptx
+++ b/Final/Figures/Afigure.pptx
@@ -243,7 +243,7 @@
           <a:p>
             <a:fld id="{8B17B723-B5A2-47A6-986D-40E292D5C90E}" type="datetimeFigureOut">
               <a:rPr lang="zh-TW" altLang="en-US" smtClean="0"/>
-              <a:t>2026/5/19</a:t>
+              <a:t>2026/5/20</a:t>
             </a:fld>
             <a:endParaRPr lang="zh-TW" altLang="en-US"/>
           </a:p>
@@ -413,7 +413,7 @@
           <a:p>
             <a:fld id="{8B17B723-B5A2-47A6-986D-40E292D5C90E}" type="datetimeFigureOut">
               <a:rPr lang="zh-TW" altLang="en-US" smtClean="0"/>
-              <a:t>2026/5/19</a:t>
+              <a:t>2026/5/20</a:t>
             </a:fld>
             <a:endParaRPr lang="zh-TW" altLang="en-US"/>
           </a:p>
@@ -593,7 +593,7 @@
           <a:p>
             <a:fld id="{8B17B723-B5A2-47A6-986D-40E292D5C90E}" type="datetimeFigureOut">
               <a:rPr lang="zh-TW" altLang="en-US" smtClean="0"/>
-              <a:t>2026/5/19</a:t>
+              <a:t>2026/5/20</a:t>
             </a:fld>
             <a:endParaRPr lang="zh-TW" altLang="en-US"/>
           </a:p>
@@ -763,7 +763,7 @@
           <a:p>
             <a:fld id="{8B17B723-B5A2-47A6-986D-40E292D5C90E}" type="datetimeFigureOut">
               <a:rPr lang="zh-TW" altLang="en-US" smtClean="0"/>
-              <a:t>2026/5/19</a:t>
+              <a:t>2026/5/20</a:t>
             </a:fld>
             <a:endParaRPr lang="zh-TW" altLang="en-US"/>
           </a:p>
@@ -1007,7 +1007,7 @@
           <a:p>
             <a:fld id="{8B17B723-B5A2-47A6-986D-40E292D5C90E}" type="datetimeFigureOut">
               <a:rPr lang="zh-TW" altLang="en-US" smtClean="0"/>
-              <a:t>2026/5/19</a:t>
+              <a:t>2026/5/20</a:t>
             </a:fld>
             <a:endParaRPr lang="zh-TW" altLang="en-US"/>
           </a:p>
@@ -1239,7 +1239,7 @@
           <a:p>
             <a:fld id="{8B17B723-B5A2-47A6-986D-40E292D5C90E}" type="datetimeFigureOut">
               <a:rPr lang="zh-TW" altLang="en-US" smtClean="0"/>
-              <a:t>2026/5/19</a:t>
+              <a:t>2026/5/20</a:t>
             </a:fld>
             <a:endParaRPr lang="zh-TW" altLang="en-US"/>
           </a:p>
@@ -1606,7 +1606,7 @@
           <a:p>
             <a:fld id="{8B17B723-B5A2-47A6-986D-40E292D5C90E}" type="datetimeFigureOut">
               <a:rPr lang="zh-TW" altLang="en-US" smtClean="0"/>
-              <a:t>2026/5/19</a:t>
+              <a:t>2026/5/20</a:t>
             </a:fld>
             <a:endParaRPr lang="zh-TW" altLang="en-US"/>
           </a:p>
@@ -1724,7 +1724,7 @@
           <a:p>
             <a:fld id="{8B17B723-B5A2-47A6-986D-40E292D5C90E}" type="datetimeFigureOut">
               <a:rPr lang="zh-TW" altLang="en-US" smtClean="0"/>
-              <a:t>2026/5/19</a:t>
+              <a:t>2026/5/20</a:t>
             </a:fld>
             <a:endParaRPr lang="zh-TW" altLang="en-US"/>
           </a:p>
@@ -1819,7 +1819,7 @@
           <a:p>
             <a:fld id="{8B17B723-B5A2-47A6-986D-40E292D5C90E}" type="datetimeFigureOut">
               <a:rPr lang="zh-TW" altLang="en-US" smtClean="0"/>
-              <a:t>2026/5/19</a:t>
+              <a:t>2026/5/20</a:t>
             </a:fld>
             <a:endParaRPr lang="zh-TW" altLang="en-US"/>
           </a:p>
@@ -2096,7 +2096,7 @@
           <a:p>
             <a:fld id="{8B17B723-B5A2-47A6-986D-40E292D5C90E}" type="datetimeFigureOut">
               <a:rPr lang="zh-TW" altLang="en-US" smtClean="0"/>
-              <a:t>2026/5/19</a:t>
+              <a:t>2026/5/20</a:t>
             </a:fld>
             <a:endParaRPr lang="zh-TW" altLang="en-US"/>
           </a:p>
@@ -2353,7 +2353,7 @@
           <a:p>
             <a:fld id="{8B17B723-B5A2-47A6-986D-40E292D5C90E}" type="datetimeFigureOut">
               <a:rPr lang="zh-TW" altLang="en-US" smtClean="0"/>
-              <a:t>2026/5/19</a:t>
+              <a:t>2026/5/20</a:t>
             </a:fld>
             <a:endParaRPr lang="zh-TW" altLang="en-US"/>
           </a:p>
@@ -2566,7 +2566,7 @@
           <a:p>
             <a:fld id="{8B17B723-B5A2-47A6-986D-40E292D5C90E}" type="datetimeFigureOut">
               <a:rPr lang="zh-TW" altLang="en-US" smtClean="0"/>
-              <a:t>2026/5/19</a:t>
+              <a:t>2026/5/20</a:t>
             </a:fld>
             <a:endParaRPr lang="zh-TW" altLang="en-US"/>
           </a:p>
@@ -2973,10 +2973,10 @@
       </p:grpSpPr>
       <p:grpSp>
         <p:nvGrpSpPr>
-          <p:cNvPr id="57" name="群組 56">
+          <p:cNvPr id="3" name="群組 2">
             <a:extLst>
               <a:ext uri="{FF2B5EF4-FFF2-40B4-BE49-F238E27FC236}">
-                <a16:creationId xmlns:a16="http://schemas.microsoft.com/office/drawing/2014/main" id="{03E5E1F5-F951-464F-A370-85D3FEC0945F}"/>
+                <a16:creationId xmlns:a16="http://schemas.microsoft.com/office/drawing/2014/main" id="{A64E32E6-8D5C-434D-91C9-4588088B0776}"/>
               </a:ext>
             </a:extLst>
           </p:cNvPr>
@@ -2985,10 +2985,10 @@
         </p:nvGrpSpPr>
         <p:grpSpPr>
           <a:xfrm>
-            <a:off x="657" y="575741"/>
-            <a:ext cx="9904687" cy="5706519"/>
-            <a:chOff x="26713" y="158636"/>
-            <a:chExt cx="9904687" cy="5706519"/>
+            <a:off x="-42106" y="489272"/>
+            <a:ext cx="9941361" cy="5910324"/>
+            <a:chOff x="-7139" y="487724"/>
+            <a:chExt cx="9941361" cy="5910324"/>
           </a:xfrm>
         </p:grpSpPr>
         <p:pic>
@@ -3028,16 +3028,16 @@
           </p:blipFill>
           <p:spPr>
             <a:xfrm>
-              <a:off x="355957" y="193012"/>
-              <a:ext cx="9575443" cy="5306088"/>
+              <a:off x="371205" y="541867"/>
+              <a:ext cx="9563017" cy="5299202"/>
             </a:xfrm>
             <a:prstGeom prst="rect">
               <a:avLst/>
             </a:prstGeom>
           </p:spPr>
         </p:pic>
-        <mc:AlternateContent xmlns:mc="http://schemas.openxmlformats.org/markup-compatibility/2006" xmlns:a14="http://schemas.microsoft.com/office/drawing/2010/main">
-          <mc:Choice Requires="a14">
+        <mc:AlternateContent xmlns:mc="http://schemas.openxmlformats.org/markup-compatibility/2006">
+          <mc:Choice xmlns:a14="http://schemas.microsoft.com/office/drawing/2010/main" Requires="a14">
             <p:sp>
               <p:nvSpPr>
                 <p:cNvPr id="18" name="文字方塊 17">
@@ -3052,8 +3052,8 @@
               </p:nvSpPr>
               <p:spPr>
                 <a:xfrm>
-                  <a:off x="2466975" y="5457723"/>
-                  <a:ext cx="460375" cy="369332"/>
+                  <a:off x="2440919" y="5874828"/>
+                  <a:ext cx="460375" cy="523220"/>
                 </a:xfrm>
                 <a:prstGeom prst="rect">
                   <a:avLst/>
@@ -3078,14 +3078,14 @@
                             <m:begChr m:val="|"/>
                             <m:endChr m:val="|"/>
                             <m:ctrlPr>
-                              <a:rPr lang="en-US" altLang="zh-TW" b="0" i="1" smtClean="0">
+                              <a:rPr lang="en-US" altLang="zh-TW" sz="2700" b="0" i="1" smtClean="0">
                                 <a:latin typeface="Cambria Math" panose="02040503050406030204" pitchFamily="18" charset="0"/>
                               </a:rPr>
                             </m:ctrlPr>
                           </m:dPr>
                           <m:e>
                             <m:r>
-                              <a:rPr lang="en-US" altLang="zh-TW" b="1" i="1">
+                              <a:rPr lang="en-US" altLang="zh-TW" sz="2700" b="1" i="1">
                                 <a:latin typeface="Cambria Math" panose="02040503050406030204" pitchFamily="18" charset="0"/>
                               </a:rPr>
                               <m:t>𝒌</m:t>
@@ -3095,12 +3095,15 @@
                       </m:oMath>
                     </m:oMathPara>
                   </a14:m>
-                  <a:endParaRPr lang="zh-TW" altLang="en-US" dirty="0"/>
+                  <a:endParaRPr lang="zh-TW" altLang="en-US" sz="2700" dirty="0">
+                    <a:latin typeface="Times New Roman" panose="02020603050405020304" pitchFamily="18" charset="0"/>
+                    <a:cs typeface="Times New Roman" panose="02020603050405020304" pitchFamily="18" charset="0"/>
+                  </a:endParaRPr>
                 </a:p>
               </p:txBody>
             </p:sp>
           </mc:Choice>
-          <mc:Fallback xmlns="">
+          <mc:Fallback>
             <p:sp>
               <p:nvSpPr>
                 <p:cNvPr id="18" name="文字方塊 17">
@@ -3117,8 +3120,8 @@
               </p:nvSpPr>
               <p:spPr>
                 <a:xfrm>
-                  <a:off x="2466975" y="5457723"/>
-                  <a:ext cx="460375" cy="369332"/>
+                  <a:off x="2440919" y="5874828"/>
+                  <a:ext cx="460375" cy="523220"/>
                 </a:xfrm>
                 <a:prstGeom prst="rect">
                   <a:avLst/>
@@ -3126,7 +3129,7 @@
                 <a:blipFill>
                   <a:blip r:embed="rId3"/>
                   <a:stretch>
-                    <a:fillRect/>
+                    <a:fillRect r="-4000"/>
                   </a:stretch>
                 </a:blipFill>
               </p:spPr>
@@ -3159,8 +3162,8 @@
           </p:nvSpPr>
           <p:spPr>
             <a:xfrm rot="16200000">
-              <a:off x="-442670" y="3326883"/>
-              <a:ext cx="1308100" cy="369332"/>
+              <a:off x="-833149" y="4037113"/>
+              <a:ext cx="2175239" cy="523220"/>
             </a:xfrm>
             <a:prstGeom prst="rect">
               <a:avLst/>
@@ -3175,15 +3178,21 @@
             <a:p>
               <a:pPr algn="ctr"/>
               <a:r>
-                <a:rPr lang="en-US" altLang="zh-TW" dirty="0"/>
+                <a:rPr lang="en-US" altLang="zh-TW" sz="2700" dirty="0">
+                  <a:latin typeface="Times New Roman" panose="02020603050405020304" pitchFamily="18" charset="0"/>
+                  <a:cs typeface="Times New Roman" panose="02020603050405020304" pitchFamily="18" charset="0"/>
+                </a:rPr>
                 <a:t>Normalized</a:t>
               </a:r>
-              <a:endParaRPr lang="zh-TW" altLang="en-US" dirty="0"/>
+              <a:endParaRPr lang="zh-TW" altLang="en-US" sz="2700" dirty="0">
+                <a:latin typeface="Times New Roman" panose="02020603050405020304" pitchFamily="18" charset="0"/>
+                <a:cs typeface="Times New Roman" panose="02020603050405020304" pitchFamily="18" charset="0"/>
+              </a:endParaRPr>
             </a:p>
           </p:txBody>
         </p:sp>
-        <mc:AlternateContent xmlns:mc="http://schemas.openxmlformats.org/markup-compatibility/2006" xmlns:a14="http://schemas.microsoft.com/office/drawing/2010/main">
-          <mc:Choice Requires="a14">
+        <mc:AlternateContent xmlns:mc="http://schemas.openxmlformats.org/markup-compatibility/2006">
+          <mc:Choice xmlns:a14="http://schemas.microsoft.com/office/drawing/2010/main" Requires="a14">
             <p:sp>
               <p:nvSpPr>
                 <p:cNvPr id="24" name="文字方塊 23">
@@ -3198,8 +3207,8 @@
               </p:nvSpPr>
               <p:spPr>
                 <a:xfrm>
-                  <a:off x="4761136" y="4543383"/>
-                  <a:ext cx="539586" cy="366612"/>
+                  <a:off x="4780236" y="4926622"/>
+                  <a:ext cx="539586" cy="523220"/>
                 </a:xfrm>
                 <a:prstGeom prst="rect">
                   <a:avLst/>
@@ -3222,14 +3231,14 @@
                         <m:sSub>
                           <m:sSubPr>
                             <m:ctrlPr>
-                              <a:rPr lang="en-US" altLang="zh-TW" i="1">
+                              <a:rPr lang="en-US" altLang="zh-TW" sz="2700" i="1">
                                 <a:latin typeface="Cambria Math" panose="02040503050406030204" pitchFamily="18" charset="0"/>
                               </a:rPr>
                             </m:ctrlPr>
                           </m:sSubPr>
                           <m:e>
                             <m:r>
-                              <a:rPr lang="en-US" altLang="zh-TW" b="1" i="1">
+                              <a:rPr lang="en-US" altLang="zh-TW" sz="2700" b="1" i="1">
                                 <a:latin typeface="Cambria Math" panose="02040503050406030204" pitchFamily="18" charset="0"/>
                               </a:rPr>
                               <m:t>𝑸</m:t>
@@ -3237,7 +3246,7 @@
                           </m:e>
                           <m:sub>
                             <m:r>
-                              <a:rPr lang="en-US" altLang="zh-TW" i="1">
+                              <a:rPr lang="en-US" altLang="zh-TW" sz="2700" i="1">
                                 <a:latin typeface="Cambria Math" panose="02040503050406030204" pitchFamily="18" charset="0"/>
                               </a:rPr>
                               <m:t>𝑐</m:t>
@@ -3247,12 +3256,15 @@
                       </m:oMath>
                     </m:oMathPara>
                   </a14:m>
-                  <a:endParaRPr lang="zh-TW" altLang="en-US" dirty="0"/>
+                  <a:endParaRPr lang="zh-TW" altLang="en-US" sz="2700" dirty="0">
+                    <a:latin typeface="Times New Roman" panose="02020603050405020304" pitchFamily="18" charset="0"/>
+                    <a:cs typeface="Times New Roman" panose="02020603050405020304" pitchFamily="18" charset="0"/>
+                  </a:endParaRPr>
                 </a:p>
               </p:txBody>
             </p:sp>
           </mc:Choice>
-          <mc:Fallback xmlns="">
+          <mc:Fallback>
             <p:sp>
               <p:nvSpPr>
                 <p:cNvPr id="24" name="文字方塊 23">
@@ -3269,16 +3281,16 @@
               </p:nvSpPr>
               <p:spPr>
                 <a:xfrm>
-                  <a:off x="4761136" y="4543383"/>
-                  <a:ext cx="539586" cy="366612"/>
+                  <a:off x="4780236" y="4926622"/>
+                  <a:ext cx="539586" cy="523220"/>
                 </a:xfrm>
                 <a:prstGeom prst="rect">
                   <a:avLst/>
                 </a:prstGeom>
                 <a:blipFill>
-                  <a:blip r:embed="rId5"/>
+                  <a:blip r:embed="rId4"/>
                   <a:stretch>
-                    <a:fillRect l="-2273" b="-10000"/>
+                    <a:fillRect/>
                   </a:stretch>
                 </a:blipFill>
               </p:spPr>
@@ -3297,8 +3309,8 @@
             </p:sp>
           </mc:Fallback>
         </mc:AlternateContent>
-        <mc:AlternateContent xmlns:mc="http://schemas.openxmlformats.org/markup-compatibility/2006" xmlns:a14="http://schemas.microsoft.com/office/drawing/2010/main">
-          <mc:Choice Requires="a14">
+        <mc:AlternateContent xmlns:mc="http://schemas.openxmlformats.org/markup-compatibility/2006">
+          <mc:Choice xmlns:a14="http://schemas.microsoft.com/office/drawing/2010/main" Requires="a14">
             <p:sp>
               <p:nvSpPr>
                 <p:cNvPr id="26" name="文字方塊 25">
@@ -3313,8 +3325,8 @@
               </p:nvSpPr>
               <p:spPr>
                 <a:xfrm>
-                  <a:off x="1238929" y="4550929"/>
-                  <a:ext cx="678771" cy="366612"/>
+                  <a:off x="1224162" y="4934168"/>
+                  <a:ext cx="678771" cy="523220"/>
                 </a:xfrm>
                 <a:prstGeom prst="rect">
                   <a:avLst/>
@@ -3335,7 +3347,7 @@
                       </m:oMathParaPr>
                       <m:oMath xmlns:m="http://schemas.openxmlformats.org/officeDocument/2006/math">
                         <m:r>
-                          <a:rPr lang="en-US" altLang="zh-TW" i="1" dirty="0">
+                          <a:rPr lang="en-US" altLang="zh-TW" sz="2700" i="1" dirty="0">
                             <a:latin typeface="Cambria Math" panose="02040503050406030204" pitchFamily="18" charset="0"/>
                           </a:rPr>
                           <m:t>0.1</m:t>
@@ -3343,14 +3355,14 @@
                         <m:sSub>
                           <m:sSubPr>
                             <m:ctrlPr>
-                              <a:rPr lang="en-US" altLang="zh-TW" i="1">
+                              <a:rPr lang="en-US" altLang="zh-TW" sz="2700" i="1">
                                 <a:latin typeface="Cambria Math" panose="02040503050406030204" pitchFamily="18" charset="0"/>
                               </a:rPr>
                             </m:ctrlPr>
                           </m:sSubPr>
                           <m:e>
                             <m:r>
-                              <a:rPr lang="en-US" altLang="zh-TW" b="1" i="1">
+                              <a:rPr lang="en-US" altLang="zh-TW" sz="2700" b="1" i="1">
                                 <a:latin typeface="Cambria Math" panose="02040503050406030204" pitchFamily="18" charset="0"/>
                               </a:rPr>
                               <m:t>𝑸</m:t>
@@ -3358,7 +3370,7 @@
                           </m:e>
                           <m:sub>
                             <m:r>
-                              <a:rPr lang="en-US" altLang="zh-TW" i="1">
+                              <a:rPr lang="en-US" altLang="zh-TW" sz="2700" i="1">
                                 <a:latin typeface="Cambria Math" panose="02040503050406030204" pitchFamily="18" charset="0"/>
                               </a:rPr>
                               <m:t>𝑐</m:t>
@@ -3368,12 +3380,15 @@
                       </m:oMath>
                     </m:oMathPara>
                   </a14:m>
-                  <a:endParaRPr lang="zh-TW" altLang="en-US" dirty="0"/>
+                  <a:endParaRPr lang="zh-TW" altLang="en-US" sz="2700" dirty="0">
+                    <a:latin typeface="Times New Roman" panose="02020603050405020304" pitchFamily="18" charset="0"/>
+                    <a:cs typeface="Times New Roman" panose="02020603050405020304" pitchFamily="18" charset="0"/>
+                  </a:endParaRPr>
                 </a:p>
               </p:txBody>
             </p:sp>
           </mc:Choice>
-          <mc:Fallback xmlns="">
+          <mc:Fallback>
             <p:sp>
               <p:nvSpPr>
                 <p:cNvPr id="26" name="文字方塊 25">
@@ -3390,16 +3405,16 @@
               </p:nvSpPr>
               <p:spPr>
                 <a:xfrm>
-                  <a:off x="1238929" y="4550929"/>
-                  <a:ext cx="678771" cy="366612"/>
+                  <a:off x="1224162" y="4934168"/>
+                  <a:ext cx="678771" cy="523220"/>
                 </a:xfrm>
                 <a:prstGeom prst="rect">
                   <a:avLst/>
                 </a:prstGeom>
                 <a:blipFill>
-                  <a:blip r:embed="rId6"/>
+                  <a:blip r:embed="rId5"/>
                   <a:stretch>
-                    <a:fillRect r="-2703" b="-10000"/>
+                    <a:fillRect r="-36036"/>
                   </a:stretch>
                 </a:blipFill>
               </p:spPr>
@@ -3432,8 +3447,8 @@
           </p:nvSpPr>
           <p:spPr>
             <a:xfrm rot="16200000">
-              <a:off x="-366417" y="551766"/>
-              <a:ext cx="1155592" cy="369332"/>
+              <a:off x="-402155" y="906194"/>
+              <a:ext cx="1237050" cy="400110"/>
             </a:xfrm>
             <a:prstGeom prst="rect">
               <a:avLst/>
@@ -3448,23 +3463,35 @@
             <a:p>
               <a:pPr algn="ctr"/>
               <a:r>
-                <a:rPr lang="en-US" altLang="zh-TW" dirty="0"/>
+                <a:rPr lang="en-US" altLang="zh-TW" sz="2000" dirty="0">
+                  <a:latin typeface="Times New Roman" panose="02020603050405020304" pitchFamily="18" charset="0"/>
+                  <a:cs typeface="Times New Roman" panose="02020603050405020304" pitchFamily="18" charset="0"/>
+                </a:rPr>
                 <a:t>(unit : </a:t>
               </a:r>
               <a:r>
-                <a:rPr lang="en-US" altLang="zh-TW" dirty="0" err="1"/>
+                <a:rPr lang="en-US" altLang="zh-TW" sz="2000" dirty="0" err="1">
+                  <a:latin typeface="Times New Roman" panose="02020603050405020304" pitchFamily="18" charset="0"/>
+                  <a:cs typeface="Times New Roman" panose="02020603050405020304" pitchFamily="18" charset="0"/>
+                </a:rPr>
                 <a:t>a.u</a:t>
               </a:r>
               <a:r>
-                <a:rPr lang="en-US" altLang="zh-TW" dirty="0"/>
+                <a:rPr lang="en-US" altLang="zh-TW" sz="2000" dirty="0">
+                  <a:latin typeface="Times New Roman" panose="02020603050405020304" pitchFamily="18" charset="0"/>
+                  <a:cs typeface="Times New Roman" panose="02020603050405020304" pitchFamily="18" charset="0"/>
+                </a:rPr>
                 <a:t>.)</a:t>
               </a:r>
-              <a:endParaRPr lang="zh-TW" altLang="en-US" dirty="0"/>
+              <a:endParaRPr lang="zh-TW" altLang="en-US" sz="2000" dirty="0">
+                <a:latin typeface="Times New Roman" panose="02020603050405020304" pitchFamily="18" charset="0"/>
+                <a:cs typeface="Times New Roman" panose="02020603050405020304" pitchFamily="18" charset="0"/>
+              </a:endParaRPr>
             </a:p>
           </p:txBody>
         </p:sp>
-        <mc:AlternateContent xmlns:mc="http://schemas.openxmlformats.org/markup-compatibility/2006" xmlns:a14="http://schemas.microsoft.com/office/drawing/2010/main">
-          <mc:Choice Requires="a14">
+        <mc:AlternateContent xmlns:mc="http://schemas.openxmlformats.org/markup-compatibility/2006">
+          <mc:Choice xmlns:a14="http://schemas.microsoft.com/office/drawing/2010/main" Requires="a14">
             <p:sp>
               <p:nvSpPr>
                 <p:cNvPr id="31" name="文字方塊 30">
@@ -3479,8 +3506,8 @@
               </p:nvSpPr>
               <p:spPr>
                 <a:xfrm>
-                  <a:off x="7901293" y="5495823"/>
-                  <a:ext cx="1906834" cy="369332"/>
+                  <a:off x="7781968" y="5914744"/>
+                  <a:ext cx="2095499" cy="400110"/>
                 </a:xfrm>
                 <a:prstGeom prst="rect">
                   <a:avLst/>
@@ -3494,23 +3521,29 @@
                 <a:lstStyle/>
                 <a:p>
                   <a:r>
-                    <a:rPr lang="zh-TW" altLang="en-US" dirty="0"/>
+                    <a:rPr lang="zh-TW" altLang="en-US" sz="2000" dirty="0">
+                      <a:latin typeface="Times New Roman" panose="02020603050405020304" pitchFamily="18" charset="0"/>
+                      <a:cs typeface="Times New Roman" panose="02020603050405020304" pitchFamily="18" charset="0"/>
+                    </a:rPr>
                     <a:t> </a:t>
                   </a:r>
                   <a:r>
-                    <a:rPr lang="en-US" altLang="zh-TW" dirty="0"/>
+                    <a:rPr lang="en-US" altLang="zh-TW" sz="2000" dirty="0">
+                      <a:latin typeface="Times New Roman" panose="02020603050405020304" pitchFamily="18" charset="0"/>
+                      <a:cs typeface="Times New Roman" panose="02020603050405020304" pitchFamily="18" charset="0"/>
+                    </a:rPr>
                     <a:t>(unit : </a:t>
                   </a:r>
                   <a14:m>
                     <m:oMath xmlns:m="http://schemas.openxmlformats.org/officeDocument/2006/math">
                       <m:r>
-                        <a:rPr lang="en-US" altLang="zh-TW" b="0" i="0" smtClean="0">
+                        <a:rPr lang="en-US" altLang="zh-TW" sz="2000" b="0" i="0" smtClean="0">
                           <a:latin typeface="Cambria Math" panose="02040503050406030204" pitchFamily="18" charset="0"/>
                         </a:rPr>
                         <m:t>1/</m:t>
                       </m:r>
                       <m:r>
-                        <a:rPr lang="en-US" altLang="zh-TW" b="0" i="1" smtClean="0">
+                        <a:rPr lang="en-US" altLang="zh-TW" sz="2000" b="0" i="1" smtClean="0">
                           <a:latin typeface="Cambria Math" panose="02040503050406030204" pitchFamily="18" charset="0"/>
                         </a:rPr>
                         <m:t>1000</m:t>
@@ -3518,14 +3551,14 @@
                       <m:sSubSup>
                         <m:sSubSupPr>
                           <m:ctrlPr>
-                            <a:rPr lang="en-US" altLang="zh-TW" b="0" i="1" smtClean="0">
+                            <a:rPr lang="en-US" altLang="zh-TW" sz="2000" b="0" i="1" smtClean="0">
                               <a:latin typeface="Cambria Math" panose="02040503050406030204" pitchFamily="18" charset="0"/>
                             </a:rPr>
                           </m:ctrlPr>
                         </m:sSubSupPr>
                         <m:e>
                           <m:r>
-                            <a:rPr lang="en-US" altLang="zh-TW" b="0" i="1" smtClean="0">
+                            <a:rPr lang="en-US" altLang="zh-TW" sz="2000" b="0" i="1" smtClean="0">
                               <a:latin typeface="Cambria Math" panose="02040503050406030204" pitchFamily="18" charset="0"/>
                             </a:rPr>
                             <m:t>𝑎</m:t>
@@ -3533,7 +3566,7 @@
                         </m:e>
                         <m:sub>
                           <m:r>
-                            <a:rPr lang="en-US" altLang="zh-TW" b="0" i="1" smtClean="0">
+                            <a:rPr lang="en-US" altLang="zh-TW" sz="2000" b="0" i="1" smtClean="0">
                               <a:latin typeface="Cambria Math" panose="02040503050406030204" pitchFamily="18" charset="0"/>
                             </a:rPr>
                             <m:t>𝐵</m:t>
@@ -3541,7 +3574,7 @@
                         </m:sub>
                         <m:sup>
                           <m:r>
-                            <a:rPr lang="en-US" altLang="zh-TW" b="0" i="1" smtClean="0">
+                            <a:rPr lang="en-US" altLang="zh-TW" sz="2000" b="0" i="1" smtClean="0">
                               <a:latin typeface="Cambria Math" panose="02040503050406030204" pitchFamily="18" charset="0"/>
                             </a:rPr>
                             <m:t>∗</m:t>
@@ -3551,15 +3584,21 @@
                     </m:oMath>
                   </a14:m>
                   <a:r>
-                    <a:rPr lang="en-US" altLang="zh-TW" dirty="0"/>
+                    <a:rPr lang="en-US" altLang="zh-TW" sz="2000" dirty="0">
+                      <a:latin typeface="Times New Roman" panose="02020603050405020304" pitchFamily="18" charset="0"/>
+                      <a:cs typeface="Times New Roman" panose="02020603050405020304" pitchFamily="18" charset="0"/>
+                    </a:rPr>
                     <a:t>)</a:t>
                   </a:r>
-                  <a:endParaRPr lang="zh-TW" altLang="en-US" dirty="0"/>
+                  <a:endParaRPr lang="zh-TW" altLang="en-US" sz="2000" dirty="0">
+                    <a:latin typeface="Times New Roman" panose="02020603050405020304" pitchFamily="18" charset="0"/>
+                    <a:cs typeface="Times New Roman" panose="02020603050405020304" pitchFamily="18" charset="0"/>
+                  </a:endParaRPr>
                 </a:p>
               </p:txBody>
             </p:sp>
           </mc:Choice>
-          <mc:Fallback xmlns="">
+          <mc:Fallback>
             <p:sp>
               <p:nvSpPr>
                 <p:cNvPr id="31" name="文字方塊 30">
@@ -3576,16 +3615,16 @@
               </p:nvSpPr>
               <p:spPr>
                 <a:xfrm>
-                  <a:off x="7901293" y="5495823"/>
-                  <a:ext cx="1906834" cy="369332"/>
+                  <a:off x="7781968" y="5914744"/>
+                  <a:ext cx="2095499" cy="400110"/>
                 </a:xfrm>
                 <a:prstGeom prst="rect">
                   <a:avLst/>
                 </a:prstGeom>
                 <a:blipFill>
-                  <a:blip r:embed="rId7"/>
+                  <a:blip r:embed="rId6"/>
                   <a:stretch>
-                    <a:fillRect t="-9836" r="-6390" b="-24590"/>
+                    <a:fillRect t="-9231" r="-6977" b="-27692"/>
                   </a:stretch>
                 </a:blipFill>
               </p:spPr>
@@ -3604,37 +3643,48 @@
             </p:sp>
           </mc:Fallback>
         </mc:AlternateContent>
+        <p:pic>
+          <p:nvPicPr>
+            <p:cNvPr id="2" name="圖片 1">
+              <a:extLst>
+                <a:ext uri="{FF2B5EF4-FFF2-40B4-BE49-F238E27FC236}">
+                  <a16:creationId xmlns:a16="http://schemas.microsoft.com/office/drawing/2014/main" id="{C35CF743-E83E-485D-9734-AD5D0AA2BF5A}"/>
+                </a:ext>
+              </a:extLst>
+            </p:cNvPr>
+            <p:cNvPicPr>
+              <a:picLocks noChangeAspect="1"/>
+            </p:cNvPicPr>
+            <p:nvPr/>
+          </p:nvPicPr>
+          <p:blipFill>
+            <a:blip r:embed="rId7">
+              <a:clrChange>
+                <a:clrFrom>
+                  <a:srgbClr val="FFFFFF"/>
+                </a:clrFrom>
+                <a:clrTo>
+                  <a:srgbClr val="FFFFFF">
+                    <a:alpha val="0"/>
+                  </a:srgbClr>
+                </a:clrTo>
+              </a:clrChange>
+            </a:blip>
+            <a:stretch>
+              <a:fillRect/>
+            </a:stretch>
+          </p:blipFill>
+          <p:spPr>
+            <a:xfrm rot="16200000">
+              <a:off x="-458896" y="2469534"/>
+              <a:ext cx="1447474" cy="388537"/>
+            </a:xfrm>
+            <a:prstGeom prst="rect">
+              <a:avLst/>
+            </a:prstGeom>
+          </p:spPr>
+        </p:pic>
       </p:grpSp>
-      <p:pic>
-        <p:nvPicPr>
-          <p:cNvPr id="2" name="圖片 1">
-            <a:extLst>
-              <a:ext uri="{FF2B5EF4-FFF2-40B4-BE49-F238E27FC236}">
-                <a16:creationId xmlns:a16="http://schemas.microsoft.com/office/drawing/2014/main" id="{C35CF743-E83E-485D-9734-AD5D0AA2BF5A}"/>
-              </a:ext>
-            </a:extLst>
-          </p:cNvPr>
-          <p:cNvPicPr>
-            <a:picLocks noChangeAspect="1"/>
-          </p:cNvPicPr>
-          <p:nvPr/>
-        </p:nvPicPr>
-        <p:blipFill>
-          <a:blip r:embed="rId8"/>
-          <a:stretch>
-            <a:fillRect/>
-          </a:stretch>
-        </p:blipFill>
-        <p:spPr>
-          <a:xfrm rot="16200000">
-            <a:off x="-409373" y="2594909"/>
-            <a:ext cx="1191702" cy="319882"/>
-          </a:xfrm>
-          <a:prstGeom prst="rect">
-            <a:avLst/>
-          </a:prstGeom>
-        </p:spPr>
-      </p:pic>
     </p:spTree>
     <p:extLst>
       <p:ext uri="{BB962C8B-B14F-4D97-AF65-F5344CB8AC3E}">

--- a/Final/Figures/Afigure.pptx
+++ b/Final/Figures/Afigure.pptx
@@ -2,12 +2,12 @@
 <file path=ppt/presentation.xml><?xml version="1.0" encoding="utf-8"?>
 <p:presentation xmlns:a="http://schemas.openxmlformats.org/drawingml/2006/main" xmlns:r="http://schemas.openxmlformats.org/officeDocument/2006/relationships" xmlns:p="http://schemas.openxmlformats.org/presentationml/2006/main" saveSubsetFonts="1">
   <p:sldMasterIdLst>
-    <p:sldMasterId id="2147483660" r:id="rId1"/>
+    <p:sldMasterId id="2147483696" r:id="rId1"/>
   </p:sldMasterIdLst>
   <p:sldIdLst>
     <p:sldId id="256" r:id="rId2"/>
   </p:sldIdLst>
-  <p:sldSz cx="9906000" cy="6858000" type="A4"/>
+  <p:sldSz cx="9906000" cy="5940425"/>
   <p:notesSz cx="6858000" cy="9144000"/>
   <p:defaultTextStyle>
     <a:defPPr>
@@ -141,15 +141,15 @@
         </p:nvSpPr>
         <p:spPr>
           <a:xfrm>
-            <a:off x="742950" y="1122363"/>
-            <a:ext cx="8420100" cy="2387600"/>
+            <a:off x="1238250" y="972195"/>
+            <a:ext cx="7429500" cy="2068148"/>
           </a:xfrm>
         </p:spPr>
         <p:txBody>
           <a:bodyPr anchor="b"/>
           <a:lstStyle>
             <a:lvl1pPr algn="ctr">
-              <a:defRPr sz="6000"/>
+              <a:defRPr sz="4875"/>
             </a:lvl1pPr>
           </a:lstStyle>
           <a:p>
@@ -173,8 +173,8 @@
         </p:nvSpPr>
         <p:spPr>
           <a:xfrm>
-            <a:off x="1238250" y="3602038"/>
-            <a:ext cx="7429500" cy="1655762"/>
+            <a:off x="1238250" y="3120099"/>
+            <a:ext cx="7429500" cy="1434227"/>
           </a:xfrm>
         </p:spPr>
         <p:txBody>
@@ -182,39 +182,39 @@
           <a:lstStyle>
             <a:lvl1pPr marL="0" indent="0" algn="ctr">
               <a:buNone/>
-              <a:defRPr sz="2400"/>
+              <a:defRPr sz="1950"/>
             </a:lvl1pPr>
-            <a:lvl2pPr marL="457200" indent="0" algn="ctr">
-              <a:buNone/>
-              <a:defRPr sz="2000"/>
+            <a:lvl2pPr marL="371475" indent="0" algn="ctr">
+              <a:buNone/>
+              <a:defRPr sz="1625"/>
             </a:lvl2pPr>
-            <a:lvl3pPr marL="914400" indent="0" algn="ctr">
-              <a:buNone/>
-              <a:defRPr sz="1800"/>
+            <a:lvl3pPr marL="742950" indent="0" algn="ctr">
+              <a:buNone/>
+              <a:defRPr sz="1463"/>
             </a:lvl3pPr>
-            <a:lvl4pPr marL="1371600" indent="0" algn="ctr">
-              <a:buNone/>
-              <a:defRPr sz="1600"/>
+            <a:lvl4pPr marL="1114425" indent="0" algn="ctr">
+              <a:buNone/>
+              <a:defRPr sz="1300"/>
             </a:lvl4pPr>
-            <a:lvl5pPr marL="1828800" indent="0" algn="ctr">
-              <a:buNone/>
-              <a:defRPr sz="1600"/>
+            <a:lvl5pPr marL="1485900" indent="0" algn="ctr">
+              <a:buNone/>
+              <a:defRPr sz="1300"/>
             </a:lvl5pPr>
-            <a:lvl6pPr marL="2286000" indent="0" algn="ctr">
-              <a:buNone/>
-              <a:defRPr sz="1600"/>
+            <a:lvl6pPr marL="1857375" indent="0" algn="ctr">
+              <a:buNone/>
+              <a:defRPr sz="1300"/>
             </a:lvl6pPr>
-            <a:lvl7pPr marL="2743200" indent="0" algn="ctr">
-              <a:buNone/>
-              <a:defRPr sz="1600"/>
+            <a:lvl7pPr marL="2228850" indent="0" algn="ctr">
+              <a:buNone/>
+              <a:defRPr sz="1300"/>
             </a:lvl7pPr>
-            <a:lvl8pPr marL="3200400" indent="0" algn="ctr">
-              <a:buNone/>
-              <a:defRPr sz="1600"/>
+            <a:lvl8pPr marL="2600325" indent="0" algn="ctr">
+              <a:buNone/>
+              <a:defRPr sz="1300"/>
             </a:lvl8pPr>
-            <a:lvl9pPr marL="3657600" indent="0" algn="ctr">
-              <a:buNone/>
-              <a:defRPr sz="1600"/>
+            <a:lvl9pPr marL="2971800" indent="0" algn="ctr">
+              <a:buNone/>
+              <a:defRPr sz="1300"/>
             </a:lvl9pPr>
           </a:lstStyle>
           <a:p>
@@ -243,7 +243,7 @@
           <a:p>
             <a:fld id="{8B17B723-B5A2-47A6-986D-40E292D5C90E}" type="datetimeFigureOut">
               <a:rPr lang="zh-TW" altLang="en-US" smtClean="0"/>
-              <a:t>2026/5/20</a:t>
+              <a:t>2026/7/1</a:t>
             </a:fld>
             <a:endParaRPr lang="zh-TW" altLang="en-US"/>
           </a:p>
@@ -294,7 +294,7 @@
     </p:spTree>
     <p:extLst>
       <p:ext uri="{BB962C8B-B14F-4D97-AF65-F5344CB8AC3E}">
-        <p14:creationId xmlns:p14="http://schemas.microsoft.com/office/powerpoint/2010/main" val="2912244544"/>
+        <p14:creationId xmlns:p14="http://schemas.microsoft.com/office/powerpoint/2010/main" val="2475665666"/>
       </p:ext>
     </p:extLst>
   </p:cSld>
@@ -413,7 +413,7 @@
           <a:p>
             <a:fld id="{8B17B723-B5A2-47A6-986D-40E292D5C90E}" type="datetimeFigureOut">
               <a:rPr lang="zh-TW" altLang="en-US" smtClean="0"/>
-              <a:t>2026/5/20</a:t>
+              <a:t>2026/7/1</a:t>
             </a:fld>
             <a:endParaRPr lang="zh-TW" altLang="en-US"/>
           </a:p>
@@ -464,7 +464,7 @@
     </p:spTree>
     <p:extLst>
       <p:ext uri="{BB962C8B-B14F-4D97-AF65-F5344CB8AC3E}">
-        <p14:creationId xmlns:p14="http://schemas.microsoft.com/office/powerpoint/2010/main" val="3461219867"/>
+        <p14:creationId xmlns:p14="http://schemas.microsoft.com/office/powerpoint/2010/main" val="931487369"/>
       </p:ext>
     </p:extLst>
   </p:cSld>
@@ -503,8 +503,8 @@
         </p:nvSpPr>
         <p:spPr>
           <a:xfrm>
-            <a:off x="7088982" y="365125"/>
-            <a:ext cx="2135981" cy="5811838"/>
+            <a:off x="7088981" y="316272"/>
+            <a:ext cx="2135981" cy="5034236"/>
           </a:xfrm>
         </p:spPr>
         <p:txBody>
@@ -531,8 +531,8 @@
         </p:nvSpPr>
         <p:spPr>
           <a:xfrm>
-            <a:off x="681038" y="365125"/>
-            <a:ext cx="6284119" cy="5811838"/>
+            <a:off x="681037" y="316272"/>
+            <a:ext cx="6284119" cy="5034236"/>
           </a:xfrm>
         </p:spPr>
         <p:txBody>
@@ -593,7 +593,7 @@
           <a:p>
             <a:fld id="{8B17B723-B5A2-47A6-986D-40E292D5C90E}" type="datetimeFigureOut">
               <a:rPr lang="zh-TW" altLang="en-US" smtClean="0"/>
-              <a:t>2026/5/20</a:t>
+              <a:t>2026/7/1</a:t>
             </a:fld>
             <a:endParaRPr lang="zh-TW" altLang="en-US"/>
           </a:p>
@@ -644,7 +644,7 @@
     </p:spTree>
     <p:extLst>
       <p:ext uri="{BB962C8B-B14F-4D97-AF65-F5344CB8AC3E}">
-        <p14:creationId xmlns:p14="http://schemas.microsoft.com/office/powerpoint/2010/main" val="2738394782"/>
+        <p14:creationId xmlns:p14="http://schemas.microsoft.com/office/powerpoint/2010/main" val="911300060"/>
       </p:ext>
     </p:extLst>
   </p:cSld>
@@ -763,7 +763,7 @@
           <a:p>
             <a:fld id="{8B17B723-B5A2-47A6-986D-40E292D5C90E}" type="datetimeFigureOut">
               <a:rPr lang="zh-TW" altLang="en-US" smtClean="0"/>
-              <a:t>2026/5/20</a:t>
+              <a:t>2026/7/1</a:t>
             </a:fld>
             <a:endParaRPr lang="zh-TW" altLang="en-US"/>
           </a:p>
@@ -814,7 +814,7 @@
     </p:spTree>
     <p:extLst>
       <p:ext uri="{BB962C8B-B14F-4D97-AF65-F5344CB8AC3E}">
-        <p14:creationId xmlns:p14="http://schemas.microsoft.com/office/powerpoint/2010/main" val="332976966"/>
+        <p14:creationId xmlns:p14="http://schemas.microsoft.com/office/powerpoint/2010/main" val="1661214938"/>
       </p:ext>
     </p:extLst>
   </p:cSld>
@@ -853,15 +853,15 @@
         </p:nvSpPr>
         <p:spPr>
           <a:xfrm>
-            <a:off x="675879" y="1709740"/>
-            <a:ext cx="8543925" cy="2852737"/>
+            <a:off x="675878" y="1480982"/>
+            <a:ext cx="8543925" cy="2471051"/>
           </a:xfrm>
         </p:spPr>
         <p:txBody>
           <a:bodyPr anchor="b"/>
           <a:lstStyle>
             <a:lvl1pPr>
-              <a:defRPr sz="6000"/>
+              <a:defRPr sz="4875"/>
             </a:lvl1pPr>
           </a:lstStyle>
           <a:p>
@@ -885,8 +885,8 @@
         </p:nvSpPr>
         <p:spPr>
           <a:xfrm>
-            <a:off x="675879" y="4589465"/>
-            <a:ext cx="8543925" cy="1500187"/>
+            <a:off x="675878" y="3975410"/>
+            <a:ext cx="8543925" cy="1299468"/>
           </a:xfrm>
         </p:spPr>
         <p:txBody>
@@ -894,15 +894,17 @@
           <a:lstStyle>
             <a:lvl1pPr marL="0" indent="0">
               <a:buNone/>
-              <a:defRPr sz="2400">
+              <a:defRPr sz="1950">
                 <a:solidFill>
-                  <a:schemeClr val="tx1"/>
+                  <a:schemeClr val="tx1">
+                    <a:tint val="75000"/>
+                  </a:schemeClr>
                 </a:solidFill>
               </a:defRPr>
             </a:lvl1pPr>
-            <a:lvl2pPr marL="457200" indent="0">
-              <a:buNone/>
-              <a:defRPr sz="2000">
+            <a:lvl2pPr marL="371475" indent="0">
+              <a:buNone/>
+              <a:defRPr sz="1625">
                 <a:solidFill>
                   <a:schemeClr val="tx1">
                     <a:tint val="75000"/>
@@ -910,9 +912,9 @@
                 </a:solidFill>
               </a:defRPr>
             </a:lvl2pPr>
-            <a:lvl3pPr marL="914400" indent="0">
-              <a:buNone/>
-              <a:defRPr sz="1800">
+            <a:lvl3pPr marL="742950" indent="0">
+              <a:buNone/>
+              <a:defRPr sz="1463">
                 <a:solidFill>
                   <a:schemeClr val="tx1">
                     <a:tint val="75000"/>
@@ -920,9 +922,9 @@
                 </a:solidFill>
               </a:defRPr>
             </a:lvl3pPr>
-            <a:lvl4pPr marL="1371600" indent="0">
-              <a:buNone/>
-              <a:defRPr sz="1600">
+            <a:lvl4pPr marL="1114425" indent="0">
+              <a:buNone/>
+              <a:defRPr sz="1300">
                 <a:solidFill>
                   <a:schemeClr val="tx1">
                     <a:tint val="75000"/>
@@ -930,9 +932,9 @@
                 </a:solidFill>
               </a:defRPr>
             </a:lvl4pPr>
-            <a:lvl5pPr marL="1828800" indent="0">
-              <a:buNone/>
-              <a:defRPr sz="1600">
+            <a:lvl5pPr marL="1485900" indent="0">
+              <a:buNone/>
+              <a:defRPr sz="1300">
                 <a:solidFill>
                   <a:schemeClr val="tx1">
                     <a:tint val="75000"/>
@@ -940,9 +942,9 @@
                 </a:solidFill>
               </a:defRPr>
             </a:lvl5pPr>
-            <a:lvl6pPr marL="2286000" indent="0">
-              <a:buNone/>
-              <a:defRPr sz="1600">
+            <a:lvl6pPr marL="1857375" indent="0">
+              <a:buNone/>
+              <a:defRPr sz="1300">
                 <a:solidFill>
                   <a:schemeClr val="tx1">
                     <a:tint val="75000"/>
@@ -950,9 +952,9 @@
                 </a:solidFill>
               </a:defRPr>
             </a:lvl6pPr>
-            <a:lvl7pPr marL="2743200" indent="0">
-              <a:buNone/>
-              <a:defRPr sz="1600">
+            <a:lvl7pPr marL="2228850" indent="0">
+              <a:buNone/>
+              <a:defRPr sz="1300">
                 <a:solidFill>
                   <a:schemeClr val="tx1">
                     <a:tint val="75000"/>
@@ -960,9 +962,9 @@
                 </a:solidFill>
               </a:defRPr>
             </a:lvl7pPr>
-            <a:lvl8pPr marL="3200400" indent="0">
-              <a:buNone/>
-              <a:defRPr sz="1600">
+            <a:lvl8pPr marL="2600325" indent="0">
+              <a:buNone/>
+              <a:defRPr sz="1300">
                 <a:solidFill>
                   <a:schemeClr val="tx1">
                     <a:tint val="75000"/>
@@ -970,9 +972,9 @@
                 </a:solidFill>
               </a:defRPr>
             </a:lvl8pPr>
-            <a:lvl9pPr marL="3657600" indent="0">
-              <a:buNone/>
-              <a:defRPr sz="1600">
+            <a:lvl9pPr marL="2971800" indent="0">
+              <a:buNone/>
+              <a:defRPr sz="1300">
                 <a:solidFill>
                   <a:schemeClr val="tx1">
                     <a:tint val="75000"/>
@@ -1007,7 +1009,7 @@
           <a:p>
             <a:fld id="{8B17B723-B5A2-47A6-986D-40E292D5C90E}" type="datetimeFigureOut">
               <a:rPr lang="zh-TW" altLang="en-US" smtClean="0"/>
-              <a:t>2026/5/20</a:t>
+              <a:t>2026/7/1</a:t>
             </a:fld>
             <a:endParaRPr lang="zh-TW" altLang="en-US"/>
           </a:p>
@@ -1058,7 +1060,7 @@
     </p:spTree>
     <p:extLst>
       <p:ext uri="{BB962C8B-B14F-4D97-AF65-F5344CB8AC3E}">
-        <p14:creationId xmlns:p14="http://schemas.microsoft.com/office/powerpoint/2010/main" val="2351911931"/>
+        <p14:creationId xmlns:p14="http://schemas.microsoft.com/office/powerpoint/2010/main" val="3571228698"/>
       </p:ext>
     </p:extLst>
   </p:cSld>
@@ -1120,8 +1122,8 @@
         </p:nvSpPr>
         <p:spPr>
           <a:xfrm>
-            <a:off x="681038" y="1825625"/>
-            <a:ext cx="4210050" cy="4351338"/>
+            <a:off x="681038" y="1581363"/>
+            <a:ext cx="4210050" cy="3769145"/>
           </a:xfrm>
         </p:spPr>
         <p:txBody>
@@ -1177,8 +1179,8 @@
         </p:nvSpPr>
         <p:spPr>
           <a:xfrm>
-            <a:off x="5014913" y="1825625"/>
-            <a:ext cx="4210050" cy="4351338"/>
+            <a:off x="5014913" y="1581363"/>
+            <a:ext cx="4210050" cy="3769145"/>
           </a:xfrm>
         </p:spPr>
         <p:txBody>
@@ -1239,7 +1241,7 @@
           <a:p>
             <a:fld id="{8B17B723-B5A2-47A6-986D-40E292D5C90E}" type="datetimeFigureOut">
               <a:rPr lang="zh-TW" altLang="en-US" smtClean="0"/>
-              <a:t>2026/5/20</a:t>
+              <a:t>2026/7/1</a:t>
             </a:fld>
             <a:endParaRPr lang="zh-TW" altLang="en-US"/>
           </a:p>
@@ -1290,7 +1292,7 @@
     </p:spTree>
     <p:extLst>
       <p:ext uri="{BB962C8B-B14F-4D97-AF65-F5344CB8AC3E}">
-        <p14:creationId xmlns:p14="http://schemas.microsoft.com/office/powerpoint/2010/main" val="2744026555"/>
+        <p14:creationId xmlns:p14="http://schemas.microsoft.com/office/powerpoint/2010/main" val="3688235735"/>
       </p:ext>
     </p:extLst>
   </p:cSld>
@@ -1329,8 +1331,8 @@
         </p:nvSpPr>
         <p:spPr>
           <a:xfrm>
-            <a:off x="682328" y="365127"/>
-            <a:ext cx="8543925" cy="1325563"/>
+            <a:off x="682328" y="316273"/>
+            <a:ext cx="8543925" cy="1148208"/>
           </a:xfrm>
         </p:spPr>
         <p:txBody>
@@ -1357,8 +1359,8 @@
         </p:nvSpPr>
         <p:spPr>
           <a:xfrm>
-            <a:off x="682329" y="1681163"/>
-            <a:ext cx="4190702" cy="823912"/>
+            <a:off x="682328" y="1456229"/>
+            <a:ext cx="4190702" cy="713676"/>
           </a:xfrm>
         </p:spPr>
         <p:txBody>
@@ -1366,39 +1368,39 @@
           <a:lstStyle>
             <a:lvl1pPr marL="0" indent="0">
               <a:buNone/>
-              <a:defRPr sz="2400" b="1"/>
+              <a:defRPr sz="1950" b="1"/>
             </a:lvl1pPr>
-            <a:lvl2pPr marL="457200" indent="0">
-              <a:buNone/>
-              <a:defRPr sz="2000" b="1"/>
+            <a:lvl2pPr marL="371475" indent="0">
+              <a:buNone/>
+              <a:defRPr sz="1625" b="1"/>
             </a:lvl2pPr>
-            <a:lvl3pPr marL="914400" indent="0">
-              <a:buNone/>
-              <a:defRPr sz="1800" b="1"/>
+            <a:lvl3pPr marL="742950" indent="0">
+              <a:buNone/>
+              <a:defRPr sz="1463" b="1"/>
             </a:lvl3pPr>
-            <a:lvl4pPr marL="1371600" indent="0">
-              <a:buNone/>
-              <a:defRPr sz="1600" b="1"/>
+            <a:lvl4pPr marL="1114425" indent="0">
+              <a:buNone/>
+              <a:defRPr sz="1300" b="1"/>
             </a:lvl4pPr>
-            <a:lvl5pPr marL="1828800" indent="0">
-              <a:buNone/>
-              <a:defRPr sz="1600" b="1"/>
+            <a:lvl5pPr marL="1485900" indent="0">
+              <a:buNone/>
+              <a:defRPr sz="1300" b="1"/>
             </a:lvl5pPr>
-            <a:lvl6pPr marL="2286000" indent="0">
-              <a:buNone/>
-              <a:defRPr sz="1600" b="1"/>
+            <a:lvl6pPr marL="1857375" indent="0">
+              <a:buNone/>
+              <a:defRPr sz="1300" b="1"/>
             </a:lvl6pPr>
-            <a:lvl7pPr marL="2743200" indent="0">
-              <a:buNone/>
-              <a:defRPr sz="1600" b="1"/>
+            <a:lvl7pPr marL="2228850" indent="0">
+              <a:buNone/>
+              <a:defRPr sz="1300" b="1"/>
             </a:lvl7pPr>
-            <a:lvl8pPr marL="3200400" indent="0">
-              <a:buNone/>
-              <a:defRPr sz="1600" b="1"/>
+            <a:lvl8pPr marL="2600325" indent="0">
+              <a:buNone/>
+              <a:defRPr sz="1300" b="1"/>
             </a:lvl8pPr>
-            <a:lvl9pPr marL="3657600" indent="0">
-              <a:buNone/>
-              <a:defRPr sz="1600" b="1"/>
+            <a:lvl9pPr marL="2971800" indent="0">
+              <a:buNone/>
+              <a:defRPr sz="1300" b="1"/>
             </a:lvl9pPr>
           </a:lstStyle>
           <a:p>
@@ -1422,8 +1424,8 @@
         </p:nvSpPr>
         <p:spPr>
           <a:xfrm>
-            <a:off x="682329" y="2505075"/>
-            <a:ext cx="4190702" cy="3684588"/>
+            <a:off x="682328" y="2169905"/>
+            <a:ext cx="4190702" cy="3191604"/>
           </a:xfrm>
         </p:spPr>
         <p:txBody>
@@ -1479,8 +1481,8 @@
         </p:nvSpPr>
         <p:spPr>
           <a:xfrm>
-            <a:off x="5014913" y="1681163"/>
-            <a:ext cx="4211340" cy="823912"/>
+            <a:off x="5014913" y="1456229"/>
+            <a:ext cx="4211340" cy="713676"/>
           </a:xfrm>
         </p:spPr>
         <p:txBody>
@@ -1488,39 +1490,39 @@
           <a:lstStyle>
             <a:lvl1pPr marL="0" indent="0">
               <a:buNone/>
-              <a:defRPr sz="2400" b="1"/>
+              <a:defRPr sz="1950" b="1"/>
             </a:lvl1pPr>
-            <a:lvl2pPr marL="457200" indent="0">
-              <a:buNone/>
-              <a:defRPr sz="2000" b="1"/>
+            <a:lvl2pPr marL="371475" indent="0">
+              <a:buNone/>
+              <a:defRPr sz="1625" b="1"/>
             </a:lvl2pPr>
-            <a:lvl3pPr marL="914400" indent="0">
-              <a:buNone/>
-              <a:defRPr sz="1800" b="1"/>
+            <a:lvl3pPr marL="742950" indent="0">
+              <a:buNone/>
+              <a:defRPr sz="1463" b="1"/>
             </a:lvl3pPr>
-            <a:lvl4pPr marL="1371600" indent="0">
-              <a:buNone/>
-              <a:defRPr sz="1600" b="1"/>
+            <a:lvl4pPr marL="1114425" indent="0">
+              <a:buNone/>
+              <a:defRPr sz="1300" b="1"/>
             </a:lvl4pPr>
-            <a:lvl5pPr marL="1828800" indent="0">
-              <a:buNone/>
-              <a:defRPr sz="1600" b="1"/>
+            <a:lvl5pPr marL="1485900" indent="0">
+              <a:buNone/>
+              <a:defRPr sz="1300" b="1"/>
             </a:lvl5pPr>
-            <a:lvl6pPr marL="2286000" indent="0">
-              <a:buNone/>
-              <a:defRPr sz="1600" b="1"/>
+            <a:lvl6pPr marL="1857375" indent="0">
+              <a:buNone/>
+              <a:defRPr sz="1300" b="1"/>
             </a:lvl6pPr>
-            <a:lvl7pPr marL="2743200" indent="0">
-              <a:buNone/>
-              <a:defRPr sz="1600" b="1"/>
+            <a:lvl7pPr marL="2228850" indent="0">
+              <a:buNone/>
+              <a:defRPr sz="1300" b="1"/>
             </a:lvl7pPr>
-            <a:lvl8pPr marL="3200400" indent="0">
-              <a:buNone/>
-              <a:defRPr sz="1600" b="1"/>
+            <a:lvl8pPr marL="2600325" indent="0">
+              <a:buNone/>
+              <a:defRPr sz="1300" b="1"/>
             </a:lvl8pPr>
-            <a:lvl9pPr marL="3657600" indent="0">
-              <a:buNone/>
-              <a:defRPr sz="1600" b="1"/>
+            <a:lvl9pPr marL="2971800" indent="0">
+              <a:buNone/>
+              <a:defRPr sz="1300" b="1"/>
             </a:lvl9pPr>
           </a:lstStyle>
           <a:p>
@@ -1544,8 +1546,8 @@
         </p:nvSpPr>
         <p:spPr>
           <a:xfrm>
-            <a:off x="5014913" y="2505075"/>
-            <a:ext cx="4211340" cy="3684588"/>
+            <a:off x="5014913" y="2169905"/>
+            <a:ext cx="4211340" cy="3191604"/>
           </a:xfrm>
         </p:spPr>
         <p:txBody>
@@ -1606,7 +1608,7 @@
           <a:p>
             <a:fld id="{8B17B723-B5A2-47A6-986D-40E292D5C90E}" type="datetimeFigureOut">
               <a:rPr lang="zh-TW" altLang="en-US" smtClean="0"/>
-              <a:t>2026/5/20</a:t>
+              <a:t>2026/7/1</a:t>
             </a:fld>
             <a:endParaRPr lang="zh-TW" altLang="en-US"/>
           </a:p>
@@ -1657,7 +1659,7 @@
     </p:spTree>
     <p:extLst>
       <p:ext uri="{BB962C8B-B14F-4D97-AF65-F5344CB8AC3E}">
-        <p14:creationId xmlns:p14="http://schemas.microsoft.com/office/powerpoint/2010/main" val="2713668193"/>
+        <p14:creationId xmlns:p14="http://schemas.microsoft.com/office/powerpoint/2010/main" val="4206233651"/>
       </p:ext>
     </p:extLst>
   </p:cSld>
@@ -1724,7 +1726,7 @@
           <a:p>
             <a:fld id="{8B17B723-B5A2-47A6-986D-40E292D5C90E}" type="datetimeFigureOut">
               <a:rPr lang="zh-TW" altLang="en-US" smtClean="0"/>
-              <a:t>2026/5/20</a:t>
+              <a:t>2026/7/1</a:t>
             </a:fld>
             <a:endParaRPr lang="zh-TW" altLang="en-US"/>
           </a:p>
@@ -1775,7 +1777,7 @@
     </p:spTree>
     <p:extLst>
       <p:ext uri="{BB962C8B-B14F-4D97-AF65-F5344CB8AC3E}">
-        <p14:creationId xmlns:p14="http://schemas.microsoft.com/office/powerpoint/2010/main" val="2437689571"/>
+        <p14:creationId xmlns:p14="http://schemas.microsoft.com/office/powerpoint/2010/main" val="1935959777"/>
       </p:ext>
     </p:extLst>
   </p:cSld>
@@ -1819,7 +1821,7 @@
           <a:p>
             <a:fld id="{8B17B723-B5A2-47A6-986D-40E292D5C90E}" type="datetimeFigureOut">
               <a:rPr lang="zh-TW" altLang="en-US" smtClean="0"/>
-              <a:t>2026/5/20</a:t>
+              <a:t>2026/7/1</a:t>
             </a:fld>
             <a:endParaRPr lang="zh-TW" altLang="en-US"/>
           </a:p>
@@ -1870,7 +1872,7 @@
     </p:spTree>
     <p:extLst>
       <p:ext uri="{BB962C8B-B14F-4D97-AF65-F5344CB8AC3E}">
-        <p14:creationId xmlns:p14="http://schemas.microsoft.com/office/powerpoint/2010/main" val="1522891291"/>
+        <p14:creationId xmlns:p14="http://schemas.microsoft.com/office/powerpoint/2010/main" val="1101436912"/>
       </p:ext>
     </p:extLst>
   </p:cSld>
@@ -1909,15 +1911,15 @@
         </p:nvSpPr>
         <p:spPr>
           <a:xfrm>
-            <a:off x="682328" y="457200"/>
-            <a:ext cx="3194943" cy="1600200"/>
+            <a:off x="682328" y="396028"/>
+            <a:ext cx="3194943" cy="1386099"/>
           </a:xfrm>
         </p:spPr>
         <p:txBody>
           <a:bodyPr anchor="b"/>
           <a:lstStyle>
             <a:lvl1pPr>
-              <a:defRPr sz="3200"/>
+              <a:defRPr sz="2600"/>
             </a:lvl1pPr>
           </a:lstStyle>
           <a:p>
@@ -1941,39 +1943,39 @@
         </p:nvSpPr>
         <p:spPr>
           <a:xfrm>
-            <a:off x="4211340" y="987427"/>
-            <a:ext cx="5014913" cy="4873625"/>
+            <a:off x="4211340" y="855312"/>
+            <a:ext cx="5014913" cy="4221552"/>
           </a:xfrm>
         </p:spPr>
         <p:txBody>
           <a:bodyPr/>
           <a:lstStyle>
             <a:lvl1pPr>
-              <a:defRPr sz="3200"/>
+              <a:defRPr sz="2600"/>
             </a:lvl1pPr>
             <a:lvl2pPr>
-              <a:defRPr sz="2800"/>
+              <a:defRPr sz="2275"/>
             </a:lvl2pPr>
             <a:lvl3pPr>
-              <a:defRPr sz="2400"/>
+              <a:defRPr sz="1950"/>
             </a:lvl3pPr>
             <a:lvl4pPr>
-              <a:defRPr sz="2000"/>
+              <a:defRPr sz="1625"/>
             </a:lvl4pPr>
             <a:lvl5pPr>
-              <a:defRPr sz="2000"/>
+              <a:defRPr sz="1625"/>
             </a:lvl5pPr>
             <a:lvl6pPr>
-              <a:defRPr sz="2000"/>
+              <a:defRPr sz="1625"/>
             </a:lvl6pPr>
             <a:lvl7pPr>
-              <a:defRPr sz="2000"/>
+              <a:defRPr sz="1625"/>
             </a:lvl7pPr>
             <a:lvl8pPr>
-              <a:defRPr sz="2000"/>
+              <a:defRPr sz="1625"/>
             </a:lvl8pPr>
             <a:lvl9pPr>
-              <a:defRPr sz="2000"/>
+              <a:defRPr sz="1625"/>
             </a:lvl9pPr>
           </a:lstStyle>
           <a:p>
@@ -2026,8 +2028,8 @@
         </p:nvSpPr>
         <p:spPr>
           <a:xfrm>
-            <a:off x="682328" y="2057400"/>
-            <a:ext cx="3194943" cy="3811588"/>
+            <a:off x="682328" y="1782127"/>
+            <a:ext cx="3194943" cy="3301612"/>
           </a:xfrm>
         </p:spPr>
         <p:txBody>
@@ -2035,39 +2037,39 @@
           <a:lstStyle>
             <a:lvl1pPr marL="0" indent="0">
               <a:buNone/>
-              <a:defRPr sz="1600"/>
+              <a:defRPr sz="1300"/>
             </a:lvl1pPr>
-            <a:lvl2pPr marL="457200" indent="0">
-              <a:buNone/>
-              <a:defRPr sz="1400"/>
+            <a:lvl2pPr marL="371475" indent="0">
+              <a:buNone/>
+              <a:defRPr sz="1138"/>
             </a:lvl2pPr>
-            <a:lvl3pPr marL="914400" indent="0">
-              <a:buNone/>
-              <a:defRPr sz="1200"/>
+            <a:lvl3pPr marL="742950" indent="0">
+              <a:buNone/>
+              <a:defRPr sz="975"/>
             </a:lvl3pPr>
-            <a:lvl4pPr marL="1371600" indent="0">
-              <a:buNone/>
-              <a:defRPr sz="1000"/>
+            <a:lvl4pPr marL="1114425" indent="0">
+              <a:buNone/>
+              <a:defRPr sz="813"/>
             </a:lvl4pPr>
-            <a:lvl5pPr marL="1828800" indent="0">
-              <a:buNone/>
-              <a:defRPr sz="1000"/>
+            <a:lvl5pPr marL="1485900" indent="0">
+              <a:buNone/>
+              <a:defRPr sz="813"/>
             </a:lvl5pPr>
-            <a:lvl6pPr marL="2286000" indent="0">
-              <a:buNone/>
-              <a:defRPr sz="1000"/>
+            <a:lvl6pPr marL="1857375" indent="0">
+              <a:buNone/>
+              <a:defRPr sz="813"/>
             </a:lvl6pPr>
-            <a:lvl7pPr marL="2743200" indent="0">
-              <a:buNone/>
-              <a:defRPr sz="1000"/>
+            <a:lvl7pPr marL="2228850" indent="0">
+              <a:buNone/>
+              <a:defRPr sz="813"/>
             </a:lvl7pPr>
-            <a:lvl8pPr marL="3200400" indent="0">
-              <a:buNone/>
-              <a:defRPr sz="1000"/>
+            <a:lvl8pPr marL="2600325" indent="0">
+              <a:buNone/>
+              <a:defRPr sz="813"/>
             </a:lvl8pPr>
-            <a:lvl9pPr marL="3657600" indent="0">
-              <a:buNone/>
-              <a:defRPr sz="1000"/>
+            <a:lvl9pPr marL="2971800" indent="0">
+              <a:buNone/>
+              <a:defRPr sz="813"/>
             </a:lvl9pPr>
           </a:lstStyle>
           <a:p>
@@ -2096,7 +2098,7 @@
           <a:p>
             <a:fld id="{8B17B723-B5A2-47A6-986D-40E292D5C90E}" type="datetimeFigureOut">
               <a:rPr lang="zh-TW" altLang="en-US" smtClean="0"/>
-              <a:t>2026/5/20</a:t>
+              <a:t>2026/7/1</a:t>
             </a:fld>
             <a:endParaRPr lang="zh-TW" altLang="en-US"/>
           </a:p>
@@ -2147,7 +2149,7 @@
     </p:spTree>
     <p:extLst>
       <p:ext uri="{BB962C8B-B14F-4D97-AF65-F5344CB8AC3E}">
-        <p14:creationId xmlns:p14="http://schemas.microsoft.com/office/powerpoint/2010/main" val="2839955896"/>
+        <p14:creationId xmlns:p14="http://schemas.microsoft.com/office/powerpoint/2010/main" val="973661735"/>
       </p:ext>
     </p:extLst>
   </p:cSld>
@@ -2186,15 +2188,15 @@
         </p:nvSpPr>
         <p:spPr>
           <a:xfrm>
-            <a:off x="682328" y="457200"/>
-            <a:ext cx="3194943" cy="1600200"/>
+            <a:off x="682328" y="396028"/>
+            <a:ext cx="3194943" cy="1386099"/>
           </a:xfrm>
         </p:spPr>
         <p:txBody>
           <a:bodyPr anchor="b"/>
           <a:lstStyle>
             <a:lvl1pPr>
-              <a:defRPr sz="3200"/>
+              <a:defRPr sz="2600"/>
             </a:lvl1pPr>
           </a:lstStyle>
           <a:p>
@@ -2218,8 +2220,8 @@
         </p:nvSpPr>
         <p:spPr>
           <a:xfrm>
-            <a:off x="4211340" y="987427"/>
-            <a:ext cx="5014913" cy="4873625"/>
+            <a:off x="4211340" y="855312"/>
+            <a:ext cx="5014913" cy="4221552"/>
           </a:xfrm>
         </p:spPr>
         <p:txBody>
@@ -2227,39 +2229,39 @@
           <a:lstStyle>
             <a:lvl1pPr marL="0" indent="0">
               <a:buNone/>
-              <a:defRPr sz="3200"/>
+              <a:defRPr sz="2600"/>
             </a:lvl1pPr>
-            <a:lvl2pPr marL="457200" indent="0">
-              <a:buNone/>
-              <a:defRPr sz="2800"/>
+            <a:lvl2pPr marL="371475" indent="0">
+              <a:buNone/>
+              <a:defRPr sz="2275"/>
             </a:lvl2pPr>
-            <a:lvl3pPr marL="914400" indent="0">
-              <a:buNone/>
-              <a:defRPr sz="2400"/>
+            <a:lvl3pPr marL="742950" indent="0">
+              <a:buNone/>
+              <a:defRPr sz="1950"/>
             </a:lvl3pPr>
-            <a:lvl4pPr marL="1371600" indent="0">
-              <a:buNone/>
-              <a:defRPr sz="2000"/>
+            <a:lvl4pPr marL="1114425" indent="0">
+              <a:buNone/>
+              <a:defRPr sz="1625"/>
             </a:lvl4pPr>
-            <a:lvl5pPr marL="1828800" indent="0">
-              <a:buNone/>
-              <a:defRPr sz="2000"/>
+            <a:lvl5pPr marL="1485900" indent="0">
+              <a:buNone/>
+              <a:defRPr sz="1625"/>
             </a:lvl5pPr>
-            <a:lvl6pPr marL="2286000" indent="0">
-              <a:buNone/>
-              <a:defRPr sz="2000"/>
+            <a:lvl6pPr marL="1857375" indent="0">
+              <a:buNone/>
+              <a:defRPr sz="1625"/>
             </a:lvl6pPr>
-            <a:lvl7pPr marL="2743200" indent="0">
-              <a:buNone/>
-              <a:defRPr sz="2000"/>
+            <a:lvl7pPr marL="2228850" indent="0">
+              <a:buNone/>
+              <a:defRPr sz="1625"/>
             </a:lvl7pPr>
-            <a:lvl8pPr marL="3200400" indent="0">
-              <a:buNone/>
-              <a:defRPr sz="2000"/>
+            <a:lvl8pPr marL="2600325" indent="0">
+              <a:buNone/>
+              <a:defRPr sz="1625"/>
             </a:lvl8pPr>
-            <a:lvl9pPr marL="3657600" indent="0">
-              <a:buNone/>
-              <a:defRPr sz="2000"/>
+            <a:lvl9pPr marL="2971800" indent="0">
+              <a:buNone/>
+              <a:defRPr sz="1625"/>
             </a:lvl9pPr>
           </a:lstStyle>
           <a:p>
@@ -2283,8 +2285,8 @@
         </p:nvSpPr>
         <p:spPr>
           <a:xfrm>
-            <a:off x="682328" y="2057400"/>
-            <a:ext cx="3194943" cy="3811588"/>
+            <a:off x="682328" y="1782127"/>
+            <a:ext cx="3194943" cy="3301612"/>
           </a:xfrm>
         </p:spPr>
         <p:txBody>
@@ -2292,39 +2294,39 @@
           <a:lstStyle>
             <a:lvl1pPr marL="0" indent="0">
               <a:buNone/>
-              <a:defRPr sz="1600"/>
+              <a:defRPr sz="1300"/>
             </a:lvl1pPr>
-            <a:lvl2pPr marL="457200" indent="0">
-              <a:buNone/>
-              <a:defRPr sz="1400"/>
+            <a:lvl2pPr marL="371475" indent="0">
+              <a:buNone/>
+              <a:defRPr sz="1138"/>
             </a:lvl2pPr>
-            <a:lvl3pPr marL="914400" indent="0">
-              <a:buNone/>
-              <a:defRPr sz="1200"/>
+            <a:lvl3pPr marL="742950" indent="0">
+              <a:buNone/>
+              <a:defRPr sz="975"/>
             </a:lvl3pPr>
-            <a:lvl4pPr marL="1371600" indent="0">
-              <a:buNone/>
-              <a:defRPr sz="1000"/>
+            <a:lvl4pPr marL="1114425" indent="0">
+              <a:buNone/>
+              <a:defRPr sz="813"/>
             </a:lvl4pPr>
-            <a:lvl5pPr marL="1828800" indent="0">
-              <a:buNone/>
-              <a:defRPr sz="1000"/>
+            <a:lvl5pPr marL="1485900" indent="0">
+              <a:buNone/>
+              <a:defRPr sz="813"/>
             </a:lvl5pPr>
-            <a:lvl6pPr marL="2286000" indent="0">
-              <a:buNone/>
-              <a:defRPr sz="1000"/>
+            <a:lvl6pPr marL="1857375" indent="0">
+              <a:buNone/>
+              <a:defRPr sz="813"/>
             </a:lvl6pPr>
-            <a:lvl7pPr marL="2743200" indent="0">
-              <a:buNone/>
-              <a:defRPr sz="1000"/>
+            <a:lvl7pPr marL="2228850" indent="0">
+              <a:buNone/>
+              <a:defRPr sz="813"/>
             </a:lvl7pPr>
-            <a:lvl8pPr marL="3200400" indent="0">
-              <a:buNone/>
-              <a:defRPr sz="1000"/>
+            <a:lvl8pPr marL="2600325" indent="0">
+              <a:buNone/>
+              <a:defRPr sz="813"/>
             </a:lvl8pPr>
-            <a:lvl9pPr marL="3657600" indent="0">
-              <a:buNone/>
-              <a:defRPr sz="1000"/>
+            <a:lvl9pPr marL="2971800" indent="0">
+              <a:buNone/>
+              <a:defRPr sz="813"/>
             </a:lvl9pPr>
           </a:lstStyle>
           <a:p>
@@ -2353,7 +2355,7 @@
           <a:p>
             <a:fld id="{8B17B723-B5A2-47A6-986D-40E292D5C90E}" type="datetimeFigureOut">
               <a:rPr lang="zh-TW" altLang="en-US" smtClean="0"/>
-              <a:t>2026/5/20</a:t>
+              <a:t>2026/7/1</a:t>
             </a:fld>
             <a:endParaRPr lang="zh-TW" altLang="en-US"/>
           </a:p>
@@ -2404,7 +2406,7 @@
     </p:spTree>
     <p:extLst>
       <p:ext uri="{BB962C8B-B14F-4D97-AF65-F5344CB8AC3E}">
-        <p14:creationId xmlns:p14="http://schemas.microsoft.com/office/powerpoint/2010/main" val="1350915433"/>
+        <p14:creationId xmlns:p14="http://schemas.microsoft.com/office/powerpoint/2010/main" val="2744810713"/>
       </p:ext>
     </p:extLst>
   </p:cSld>
@@ -2448,8 +2450,8 @@
         </p:nvSpPr>
         <p:spPr>
           <a:xfrm>
-            <a:off x="681038" y="365127"/>
-            <a:ext cx="8543925" cy="1325563"/>
+            <a:off x="681038" y="316273"/>
+            <a:ext cx="8543925" cy="1148208"/>
           </a:xfrm>
           <a:prstGeom prst="rect">
             <a:avLst/>
@@ -2481,8 +2483,8 @@
         </p:nvSpPr>
         <p:spPr>
           <a:xfrm>
-            <a:off x="681038" y="1825625"/>
-            <a:ext cx="8543925" cy="4351338"/>
+            <a:off x="681038" y="1581363"/>
+            <a:ext cx="8543925" cy="3769145"/>
           </a:xfrm>
           <a:prstGeom prst="rect">
             <a:avLst/>
@@ -2543,8 +2545,8 @@
         </p:nvSpPr>
         <p:spPr>
           <a:xfrm>
-            <a:off x="681038" y="6356352"/>
-            <a:ext cx="2228850" cy="365125"/>
+            <a:off x="681038" y="5505894"/>
+            <a:ext cx="2228850" cy="316273"/>
           </a:xfrm>
           <a:prstGeom prst="rect">
             <a:avLst/>
@@ -2554,7 +2556,7 @@
           <a:bodyPr vert="horz" lIns="91440" tIns="45720" rIns="91440" bIns="45720" rtlCol="0" anchor="ctr"/>
           <a:lstStyle>
             <a:lvl1pPr algn="l">
-              <a:defRPr sz="1200">
+              <a:defRPr sz="975">
                 <a:solidFill>
                   <a:schemeClr val="tx1">
                     <a:tint val="75000"/>
@@ -2566,7 +2568,7 @@
           <a:p>
             <a:fld id="{8B17B723-B5A2-47A6-986D-40E292D5C90E}" type="datetimeFigureOut">
               <a:rPr lang="zh-TW" altLang="en-US" smtClean="0"/>
-              <a:t>2026/5/20</a:t>
+              <a:t>2026/7/1</a:t>
             </a:fld>
             <a:endParaRPr lang="zh-TW" altLang="en-US"/>
           </a:p>
@@ -2584,8 +2586,8 @@
         </p:nvSpPr>
         <p:spPr>
           <a:xfrm>
-            <a:off x="3281363" y="6356352"/>
-            <a:ext cx="3343275" cy="365125"/>
+            <a:off x="3281363" y="5505894"/>
+            <a:ext cx="3343275" cy="316273"/>
           </a:xfrm>
           <a:prstGeom prst="rect">
             <a:avLst/>
@@ -2595,7 +2597,7 @@
           <a:bodyPr vert="horz" lIns="91440" tIns="45720" rIns="91440" bIns="45720" rtlCol="0" anchor="ctr"/>
           <a:lstStyle>
             <a:lvl1pPr algn="ctr">
-              <a:defRPr sz="1200">
+              <a:defRPr sz="975">
                 <a:solidFill>
                   <a:schemeClr val="tx1">
                     <a:tint val="75000"/>
@@ -2621,8 +2623,8 @@
         </p:nvSpPr>
         <p:spPr>
           <a:xfrm>
-            <a:off x="6996113" y="6356352"/>
-            <a:ext cx="2228850" cy="365125"/>
+            <a:off x="6996113" y="5505894"/>
+            <a:ext cx="2228850" cy="316273"/>
           </a:xfrm>
           <a:prstGeom prst="rect">
             <a:avLst/>
@@ -2632,7 +2634,7 @@
           <a:bodyPr vert="horz" lIns="91440" tIns="45720" rIns="91440" bIns="45720" rtlCol="0" anchor="ctr"/>
           <a:lstStyle>
             <a:lvl1pPr algn="r">
-              <a:defRPr sz="1200">
+              <a:defRPr sz="975">
                 <a:solidFill>
                   <a:schemeClr val="tx1">
                     <a:tint val="75000"/>
@@ -2653,27 +2655,27 @@
     </p:spTree>
     <p:extLst>
       <p:ext uri="{BB962C8B-B14F-4D97-AF65-F5344CB8AC3E}">
-        <p14:creationId xmlns:p14="http://schemas.microsoft.com/office/powerpoint/2010/main" val="2907049643"/>
+        <p14:creationId xmlns:p14="http://schemas.microsoft.com/office/powerpoint/2010/main" val="1971030885"/>
       </p:ext>
     </p:extLst>
   </p:cSld>
   <p:clrMap bg1="lt1" tx1="dk1" bg2="lt2" tx2="dk2" accent1="accent1" accent2="accent2" accent3="accent3" accent4="accent4" accent5="accent5" accent6="accent6" hlink="hlink" folHlink="folHlink"/>
   <p:sldLayoutIdLst>
-    <p:sldLayoutId id="2147483661" r:id="rId1"/>
-    <p:sldLayoutId id="2147483662" r:id="rId2"/>
-    <p:sldLayoutId id="2147483663" r:id="rId3"/>
-    <p:sldLayoutId id="2147483664" r:id="rId4"/>
-    <p:sldLayoutId id="2147483665" r:id="rId5"/>
-    <p:sldLayoutId id="2147483666" r:id="rId6"/>
-    <p:sldLayoutId id="2147483667" r:id="rId7"/>
-    <p:sldLayoutId id="2147483668" r:id="rId8"/>
-    <p:sldLayoutId id="2147483669" r:id="rId9"/>
-    <p:sldLayoutId id="2147483670" r:id="rId10"/>
-    <p:sldLayoutId id="2147483671" r:id="rId11"/>
+    <p:sldLayoutId id="2147483697" r:id="rId1"/>
+    <p:sldLayoutId id="2147483698" r:id="rId2"/>
+    <p:sldLayoutId id="2147483699" r:id="rId3"/>
+    <p:sldLayoutId id="2147483700" r:id="rId4"/>
+    <p:sldLayoutId id="2147483701" r:id="rId5"/>
+    <p:sldLayoutId id="2147483702" r:id="rId6"/>
+    <p:sldLayoutId id="2147483703" r:id="rId7"/>
+    <p:sldLayoutId id="2147483704" r:id="rId8"/>
+    <p:sldLayoutId id="2147483705" r:id="rId9"/>
+    <p:sldLayoutId id="2147483706" r:id="rId10"/>
+    <p:sldLayoutId id="2147483707" r:id="rId11"/>
   </p:sldLayoutIdLst>
   <p:txStyles>
     <p:titleStyle>
-      <a:lvl1pPr algn="l" defTabSz="914400" rtl="0" eaLnBrk="1" latinLnBrk="0" hangingPunct="1">
+      <a:lvl1pPr algn="l" defTabSz="742950" rtl="0" eaLnBrk="1" latinLnBrk="0" hangingPunct="1">
         <a:lnSpc>
           <a:spcPct val="90000"/>
         </a:lnSpc>
@@ -2681,7 +2683,7 @@
           <a:spcPct val="0"/>
         </a:spcBef>
         <a:buNone/>
-        <a:defRPr sz="4400" kern="1200">
+        <a:defRPr sz="3575" kern="1200">
           <a:solidFill>
             <a:schemeClr val="tx1"/>
           </a:solidFill>
@@ -2692,16 +2694,16 @@
       </a:lvl1pPr>
     </p:titleStyle>
     <p:bodyStyle>
-      <a:lvl1pPr marL="228600" indent="-228600" algn="l" defTabSz="914400" rtl="0" eaLnBrk="1" latinLnBrk="0" hangingPunct="1">
+      <a:lvl1pPr marL="185738" indent="-185738" algn="l" defTabSz="742950" rtl="0" eaLnBrk="1" latinLnBrk="0" hangingPunct="1">
         <a:lnSpc>
           <a:spcPct val="90000"/>
         </a:lnSpc>
         <a:spcBef>
-          <a:spcPts val="1000"/>
+          <a:spcPts val="813"/>
         </a:spcBef>
         <a:buFont typeface="Arial" panose="020B0604020202020204" pitchFamily="34" charset="0"/>
         <a:buChar char="•"/>
-        <a:defRPr sz="2800" kern="1200">
+        <a:defRPr sz="2275" kern="1200">
           <a:solidFill>
             <a:schemeClr val="tx1"/>
           </a:solidFill>
@@ -2710,16 +2712,16 @@
           <a:cs typeface="+mn-cs"/>
         </a:defRPr>
       </a:lvl1pPr>
-      <a:lvl2pPr marL="685800" indent="-228600" algn="l" defTabSz="914400" rtl="0" eaLnBrk="1" latinLnBrk="0" hangingPunct="1">
+      <a:lvl2pPr marL="557213" indent="-185738" algn="l" defTabSz="742950" rtl="0" eaLnBrk="1" latinLnBrk="0" hangingPunct="1">
         <a:lnSpc>
           <a:spcPct val="90000"/>
         </a:lnSpc>
         <a:spcBef>
-          <a:spcPts val="500"/>
+          <a:spcPts val="406"/>
         </a:spcBef>
         <a:buFont typeface="Arial" panose="020B0604020202020204" pitchFamily="34" charset="0"/>
         <a:buChar char="•"/>
-        <a:defRPr sz="2400" kern="1200">
+        <a:defRPr sz="1950" kern="1200">
           <a:solidFill>
             <a:schemeClr val="tx1"/>
           </a:solidFill>
@@ -2728,16 +2730,16 @@
           <a:cs typeface="+mn-cs"/>
         </a:defRPr>
       </a:lvl2pPr>
-      <a:lvl3pPr marL="1143000" indent="-228600" algn="l" defTabSz="914400" rtl="0" eaLnBrk="1" latinLnBrk="0" hangingPunct="1">
+      <a:lvl3pPr marL="928688" indent="-185738" algn="l" defTabSz="742950" rtl="0" eaLnBrk="1" latinLnBrk="0" hangingPunct="1">
         <a:lnSpc>
           <a:spcPct val="90000"/>
         </a:lnSpc>
         <a:spcBef>
-          <a:spcPts val="500"/>
+          <a:spcPts val="406"/>
         </a:spcBef>
         <a:buFont typeface="Arial" panose="020B0604020202020204" pitchFamily="34" charset="0"/>
         <a:buChar char="•"/>
-        <a:defRPr sz="2000" kern="1200">
+        <a:defRPr sz="1625" kern="1200">
           <a:solidFill>
             <a:schemeClr val="tx1"/>
           </a:solidFill>
@@ -2746,16 +2748,16 @@
           <a:cs typeface="+mn-cs"/>
         </a:defRPr>
       </a:lvl3pPr>
-      <a:lvl4pPr marL="1600200" indent="-228600" algn="l" defTabSz="914400" rtl="0" eaLnBrk="1" latinLnBrk="0" hangingPunct="1">
+      <a:lvl4pPr marL="1300163" indent="-185738" algn="l" defTabSz="742950" rtl="0" eaLnBrk="1" latinLnBrk="0" hangingPunct="1">
         <a:lnSpc>
           <a:spcPct val="90000"/>
         </a:lnSpc>
         <a:spcBef>
-          <a:spcPts val="500"/>
+          <a:spcPts val="406"/>
         </a:spcBef>
         <a:buFont typeface="Arial" panose="020B0604020202020204" pitchFamily="34" charset="0"/>
         <a:buChar char="•"/>
-        <a:defRPr sz="1800" kern="1200">
+        <a:defRPr sz="1463" kern="1200">
           <a:solidFill>
             <a:schemeClr val="tx1"/>
           </a:solidFill>
@@ -2764,16 +2766,16 @@
           <a:cs typeface="+mn-cs"/>
         </a:defRPr>
       </a:lvl4pPr>
-      <a:lvl5pPr marL="2057400" indent="-228600" algn="l" defTabSz="914400" rtl="0" eaLnBrk="1" latinLnBrk="0" hangingPunct="1">
+      <a:lvl5pPr marL="1671638" indent="-185738" algn="l" defTabSz="742950" rtl="0" eaLnBrk="1" latinLnBrk="0" hangingPunct="1">
         <a:lnSpc>
           <a:spcPct val="90000"/>
         </a:lnSpc>
         <a:spcBef>
-          <a:spcPts val="500"/>
+          <a:spcPts val="406"/>
         </a:spcBef>
         <a:buFont typeface="Arial" panose="020B0604020202020204" pitchFamily="34" charset="0"/>
         <a:buChar char="•"/>
-        <a:defRPr sz="1800" kern="1200">
+        <a:defRPr sz="1463" kern="1200">
           <a:solidFill>
             <a:schemeClr val="tx1"/>
           </a:solidFill>
@@ -2782,16 +2784,16 @@
           <a:cs typeface="+mn-cs"/>
         </a:defRPr>
       </a:lvl5pPr>
-      <a:lvl6pPr marL="2514600" indent="-228600" algn="l" defTabSz="914400" rtl="0" eaLnBrk="1" latinLnBrk="0" hangingPunct="1">
+      <a:lvl6pPr marL="2043113" indent="-185738" algn="l" defTabSz="742950" rtl="0" eaLnBrk="1" latinLnBrk="0" hangingPunct="1">
         <a:lnSpc>
           <a:spcPct val="90000"/>
         </a:lnSpc>
         <a:spcBef>
-          <a:spcPts val="500"/>
+          <a:spcPts val="406"/>
         </a:spcBef>
         <a:buFont typeface="Arial" panose="020B0604020202020204" pitchFamily="34" charset="0"/>
         <a:buChar char="•"/>
-        <a:defRPr sz="1800" kern="1200">
+        <a:defRPr sz="1463" kern="1200">
           <a:solidFill>
             <a:schemeClr val="tx1"/>
           </a:solidFill>
@@ -2800,16 +2802,16 @@
           <a:cs typeface="+mn-cs"/>
         </a:defRPr>
       </a:lvl6pPr>
-      <a:lvl7pPr marL="2971800" indent="-228600" algn="l" defTabSz="914400" rtl="0" eaLnBrk="1" latinLnBrk="0" hangingPunct="1">
+      <a:lvl7pPr marL="2414588" indent="-185738" algn="l" defTabSz="742950" rtl="0" eaLnBrk="1" latinLnBrk="0" hangingPunct="1">
         <a:lnSpc>
           <a:spcPct val="90000"/>
         </a:lnSpc>
         <a:spcBef>
-          <a:spcPts val="500"/>
+          <a:spcPts val="406"/>
         </a:spcBef>
         <a:buFont typeface="Arial" panose="020B0604020202020204" pitchFamily="34" charset="0"/>
         <a:buChar char="•"/>
-        <a:defRPr sz="1800" kern="1200">
+        <a:defRPr sz="1463" kern="1200">
           <a:solidFill>
             <a:schemeClr val="tx1"/>
           </a:solidFill>
@@ -2818,16 +2820,16 @@
           <a:cs typeface="+mn-cs"/>
         </a:defRPr>
       </a:lvl7pPr>
-      <a:lvl8pPr marL="3429000" indent="-228600" algn="l" defTabSz="914400" rtl="0" eaLnBrk="1" latinLnBrk="0" hangingPunct="1">
+      <a:lvl8pPr marL="2786063" indent="-185738" algn="l" defTabSz="742950" rtl="0" eaLnBrk="1" latinLnBrk="0" hangingPunct="1">
         <a:lnSpc>
           <a:spcPct val="90000"/>
         </a:lnSpc>
         <a:spcBef>
-          <a:spcPts val="500"/>
+          <a:spcPts val="406"/>
         </a:spcBef>
         <a:buFont typeface="Arial" panose="020B0604020202020204" pitchFamily="34" charset="0"/>
         <a:buChar char="•"/>
-        <a:defRPr sz="1800" kern="1200">
+        <a:defRPr sz="1463" kern="1200">
           <a:solidFill>
             <a:schemeClr val="tx1"/>
           </a:solidFill>
@@ -2836,16 +2838,16 @@
           <a:cs typeface="+mn-cs"/>
         </a:defRPr>
       </a:lvl8pPr>
-      <a:lvl9pPr marL="3886200" indent="-228600" algn="l" defTabSz="914400" rtl="0" eaLnBrk="1" latinLnBrk="0" hangingPunct="1">
+      <a:lvl9pPr marL="3157538" indent="-185738" algn="l" defTabSz="742950" rtl="0" eaLnBrk="1" latinLnBrk="0" hangingPunct="1">
         <a:lnSpc>
           <a:spcPct val="90000"/>
         </a:lnSpc>
         <a:spcBef>
-          <a:spcPts val="500"/>
+          <a:spcPts val="406"/>
         </a:spcBef>
         <a:buFont typeface="Arial" panose="020B0604020202020204" pitchFamily="34" charset="0"/>
         <a:buChar char="•"/>
-        <a:defRPr sz="1800" kern="1200">
+        <a:defRPr sz="1463" kern="1200">
           <a:solidFill>
             <a:schemeClr val="tx1"/>
           </a:solidFill>
@@ -2859,8 +2861,8 @@
       <a:defPPr>
         <a:defRPr lang="en-US"/>
       </a:defPPr>
-      <a:lvl1pPr marL="0" algn="l" defTabSz="914400" rtl="0" eaLnBrk="1" latinLnBrk="0" hangingPunct="1">
-        <a:defRPr sz="1800" kern="1200">
+      <a:lvl1pPr marL="0" algn="l" defTabSz="742950" rtl="0" eaLnBrk="1" latinLnBrk="0" hangingPunct="1">
+        <a:defRPr sz="1463" kern="1200">
           <a:solidFill>
             <a:schemeClr val="tx1"/>
           </a:solidFill>
@@ -2869,8 +2871,8 @@
           <a:cs typeface="+mn-cs"/>
         </a:defRPr>
       </a:lvl1pPr>
-      <a:lvl2pPr marL="457200" algn="l" defTabSz="914400" rtl="0" eaLnBrk="1" latinLnBrk="0" hangingPunct="1">
-        <a:defRPr sz="1800" kern="1200">
+      <a:lvl2pPr marL="371475" algn="l" defTabSz="742950" rtl="0" eaLnBrk="1" latinLnBrk="0" hangingPunct="1">
+        <a:defRPr sz="1463" kern="1200">
           <a:solidFill>
             <a:schemeClr val="tx1"/>
           </a:solidFill>
@@ -2879,8 +2881,8 @@
           <a:cs typeface="+mn-cs"/>
         </a:defRPr>
       </a:lvl2pPr>
-      <a:lvl3pPr marL="914400" algn="l" defTabSz="914400" rtl="0" eaLnBrk="1" latinLnBrk="0" hangingPunct="1">
-        <a:defRPr sz="1800" kern="1200">
+      <a:lvl3pPr marL="742950" algn="l" defTabSz="742950" rtl="0" eaLnBrk="1" latinLnBrk="0" hangingPunct="1">
+        <a:defRPr sz="1463" kern="1200">
           <a:solidFill>
             <a:schemeClr val="tx1"/>
           </a:solidFill>
@@ -2889,8 +2891,8 @@
           <a:cs typeface="+mn-cs"/>
         </a:defRPr>
       </a:lvl3pPr>
-      <a:lvl4pPr marL="1371600" algn="l" defTabSz="914400" rtl="0" eaLnBrk="1" latinLnBrk="0" hangingPunct="1">
-        <a:defRPr sz="1800" kern="1200">
+      <a:lvl4pPr marL="1114425" algn="l" defTabSz="742950" rtl="0" eaLnBrk="1" latinLnBrk="0" hangingPunct="1">
+        <a:defRPr sz="1463" kern="1200">
           <a:solidFill>
             <a:schemeClr val="tx1"/>
           </a:solidFill>
@@ -2899,8 +2901,8 @@
           <a:cs typeface="+mn-cs"/>
         </a:defRPr>
       </a:lvl4pPr>
-      <a:lvl5pPr marL="1828800" algn="l" defTabSz="914400" rtl="0" eaLnBrk="1" latinLnBrk="0" hangingPunct="1">
-        <a:defRPr sz="1800" kern="1200">
+      <a:lvl5pPr marL="1485900" algn="l" defTabSz="742950" rtl="0" eaLnBrk="1" latinLnBrk="0" hangingPunct="1">
+        <a:defRPr sz="1463" kern="1200">
           <a:solidFill>
             <a:schemeClr val="tx1"/>
           </a:solidFill>
@@ -2909,8 +2911,8 @@
           <a:cs typeface="+mn-cs"/>
         </a:defRPr>
       </a:lvl5pPr>
-      <a:lvl6pPr marL="2286000" algn="l" defTabSz="914400" rtl="0" eaLnBrk="1" latinLnBrk="0" hangingPunct="1">
-        <a:defRPr sz="1800" kern="1200">
+      <a:lvl6pPr marL="1857375" algn="l" defTabSz="742950" rtl="0" eaLnBrk="1" latinLnBrk="0" hangingPunct="1">
+        <a:defRPr sz="1463" kern="1200">
           <a:solidFill>
             <a:schemeClr val="tx1"/>
           </a:solidFill>
@@ -2919,8 +2921,8 @@
           <a:cs typeface="+mn-cs"/>
         </a:defRPr>
       </a:lvl6pPr>
-      <a:lvl7pPr marL="2743200" algn="l" defTabSz="914400" rtl="0" eaLnBrk="1" latinLnBrk="0" hangingPunct="1">
-        <a:defRPr sz="1800" kern="1200">
+      <a:lvl7pPr marL="2228850" algn="l" defTabSz="742950" rtl="0" eaLnBrk="1" latinLnBrk="0" hangingPunct="1">
+        <a:defRPr sz="1463" kern="1200">
           <a:solidFill>
             <a:schemeClr val="tx1"/>
           </a:solidFill>
@@ -2929,8 +2931,8 @@
           <a:cs typeface="+mn-cs"/>
         </a:defRPr>
       </a:lvl7pPr>
-      <a:lvl8pPr marL="3200400" algn="l" defTabSz="914400" rtl="0" eaLnBrk="1" latinLnBrk="0" hangingPunct="1">
-        <a:defRPr sz="1800" kern="1200">
+      <a:lvl8pPr marL="2600325" algn="l" defTabSz="742950" rtl="0" eaLnBrk="1" latinLnBrk="0" hangingPunct="1">
+        <a:defRPr sz="1463" kern="1200">
           <a:solidFill>
             <a:schemeClr val="tx1"/>
           </a:solidFill>
@@ -2939,8 +2941,8 @@
           <a:cs typeface="+mn-cs"/>
         </a:defRPr>
       </a:lvl8pPr>
-      <a:lvl9pPr marL="3657600" algn="l" defTabSz="914400" rtl="0" eaLnBrk="1" latinLnBrk="0" hangingPunct="1">
-        <a:defRPr sz="1800" kern="1200">
+      <a:lvl9pPr marL="2971800" algn="l" defTabSz="742950" rtl="0" eaLnBrk="1" latinLnBrk="0" hangingPunct="1">
+        <a:defRPr sz="1463" kern="1200">
           <a:solidFill>
             <a:schemeClr val="tx1"/>
           </a:solidFill>
@@ -2985,7 +2987,7 @@
         </p:nvGrpSpPr>
         <p:grpSpPr>
           <a:xfrm>
-            <a:off x="-42106" y="489272"/>
+            <a:off x="-42106" y="30484"/>
             <a:ext cx="9941361" cy="5910324"/>
             <a:chOff x="-7139" y="487724"/>
             <a:chExt cx="9941361" cy="5910324"/>
@@ -3036,8 +3038,8 @@
             </a:prstGeom>
           </p:spPr>
         </p:pic>
-        <mc:AlternateContent xmlns:mc="http://schemas.openxmlformats.org/markup-compatibility/2006">
-          <mc:Choice xmlns:a14="http://schemas.microsoft.com/office/drawing/2010/main" Requires="a14">
+        <mc:AlternateContent xmlns:mc="http://schemas.openxmlformats.org/markup-compatibility/2006" xmlns:a14="http://schemas.microsoft.com/office/drawing/2010/main">
+          <mc:Choice Requires="a14">
             <p:sp>
               <p:nvSpPr>
                 <p:cNvPr id="18" name="文字方塊 17">
@@ -3078,7 +3080,7 @@
                             <m:begChr m:val="|"/>
                             <m:endChr m:val="|"/>
                             <m:ctrlPr>
-                              <a:rPr lang="en-US" altLang="zh-TW" sz="2700" b="0" i="1" smtClean="0">
+                              <a:rPr lang="en-US" altLang="zh-TW" sz="2700" i="1">
                                 <a:latin typeface="Cambria Math" panose="02040503050406030204" pitchFamily="18" charset="0"/>
                               </a:rPr>
                             </m:ctrlPr>
@@ -3103,7 +3105,7 @@
               </p:txBody>
             </p:sp>
           </mc:Choice>
-          <mc:Fallback>
+          <mc:Fallback xmlns="">
             <p:sp>
               <p:nvSpPr>
                 <p:cNvPr id="18" name="文字方塊 17">
@@ -3191,8 +3193,8 @@
             </a:p>
           </p:txBody>
         </p:sp>
-        <mc:AlternateContent xmlns:mc="http://schemas.openxmlformats.org/markup-compatibility/2006">
-          <mc:Choice xmlns:a14="http://schemas.microsoft.com/office/drawing/2010/main" Requires="a14">
+        <mc:AlternateContent xmlns:mc="http://schemas.openxmlformats.org/markup-compatibility/2006" xmlns:a14="http://schemas.microsoft.com/office/drawing/2010/main">
+          <mc:Choice Requires="a14">
             <p:sp>
               <p:nvSpPr>
                 <p:cNvPr id="24" name="文字方塊 23">
@@ -3264,7 +3266,7 @@
               </p:txBody>
             </p:sp>
           </mc:Choice>
-          <mc:Fallback>
+          <mc:Fallback xmlns="">
             <p:sp>
               <p:nvSpPr>
                 <p:cNvPr id="24" name="文字方塊 23">
@@ -3309,8 +3311,8 @@
             </p:sp>
           </mc:Fallback>
         </mc:AlternateContent>
-        <mc:AlternateContent xmlns:mc="http://schemas.openxmlformats.org/markup-compatibility/2006">
-          <mc:Choice xmlns:a14="http://schemas.microsoft.com/office/drawing/2010/main" Requires="a14">
+        <mc:AlternateContent xmlns:mc="http://schemas.openxmlformats.org/markup-compatibility/2006" xmlns:a14="http://schemas.microsoft.com/office/drawing/2010/main">
+          <mc:Choice Requires="a14">
             <p:sp>
               <p:nvSpPr>
                 <p:cNvPr id="26" name="文字方塊 25">
@@ -3388,7 +3390,7 @@
               </p:txBody>
             </p:sp>
           </mc:Choice>
-          <mc:Fallback>
+          <mc:Fallback xmlns="">
             <p:sp>
               <p:nvSpPr>
                 <p:cNvPr id="26" name="文字方塊 25">
@@ -3490,8 +3492,8 @@
             </a:p>
           </p:txBody>
         </p:sp>
-        <mc:AlternateContent xmlns:mc="http://schemas.openxmlformats.org/markup-compatibility/2006">
-          <mc:Choice xmlns:a14="http://schemas.microsoft.com/office/drawing/2010/main" Requires="a14">
+        <mc:AlternateContent xmlns:mc="http://schemas.openxmlformats.org/markup-compatibility/2006" xmlns:a14="http://schemas.microsoft.com/office/drawing/2010/main">
+          <mc:Choice Requires="a14">
             <p:sp>
               <p:nvSpPr>
                 <p:cNvPr id="31" name="文字方塊 30">
@@ -3537,13 +3539,13 @@
                   <a14:m>
                     <m:oMath xmlns:m="http://schemas.openxmlformats.org/officeDocument/2006/math">
                       <m:r>
-                        <a:rPr lang="en-US" altLang="zh-TW" sz="2000" b="0" i="0" smtClean="0">
+                        <a:rPr lang="en-US" altLang="zh-TW" sz="2000">
                           <a:latin typeface="Cambria Math" panose="02040503050406030204" pitchFamily="18" charset="0"/>
                         </a:rPr>
                         <m:t>1/</m:t>
                       </m:r>
                       <m:r>
-                        <a:rPr lang="en-US" altLang="zh-TW" sz="2000" b="0" i="1" smtClean="0">
+                        <a:rPr lang="en-US" altLang="zh-TW" sz="2000" i="1">
                           <a:latin typeface="Cambria Math" panose="02040503050406030204" pitchFamily="18" charset="0"/>
                         </a:rPr>
                         <m:t>1000</m:t>
@@ -3551,14 +3553,14 @@
                       <m:sSubSup>
                         <m:sSubSupPr>
                           <m:ctrlPr>
-                            <a:rPr lang="en-US" altLang="zh-TW" sz="2000" b="0" i="1" smtClean="0">
+                            <a:rPr lang="en-US" altLang="zh-TW" sz="2000" i="1">
                               <a:latin typeface="Cambria Math" panose="02040503050406030204" pitchFamily="18" charset="0"/>
                             </a:rPr>
                           </m:ctrlPr>
                         </m:sSubSupPr>
                         <m:e>
                           <m:r>
-                            <a:rPr lang="en-US" altLang="zh-TW" sz="2000" b="0" i="1" smtClean="0">
+                            <a:rPr lang="en-US" altLang="zh-TW" sz="2000" i="1">
                               <a:latin typeface="Cambria Math" panose="02040503050406030204" pitchFamily="18" charset="0"/>
                             </a:rPr>
                             <m:t>𝑎</m:t>
@@ -3566,7 +3568,7 @@
                         </m:e>
                         <m:sub>
                           <m:r>
-                            <a:rPr lang="en-US" altLang="zh-TW" sz="2000" b="0" i="1" smtClean="0">
+                            <a:rPr lang="en-US" altLang="zh-TW" sz="2000" i="1">
                               <a:latin typeface="Cambria Math" panose="02040503050406030204" pitchFamily="18" charset="0"/>
                             </a:rPr>
                             <m:t>𝐵</m:t>
@@ -3574,7 +3576,7 @@
                         </m:sub>
                         <m:sup>
                           <m:r>
-                            <a:rPr lang="en-US" altLang="zh-TW" sz="2000" b="0" i="1" smtClean="0">
+                            <a:rPr lang="en-US" altLang="zh-TW" sz="2000" i="1">
                               <a:latin typeface="Cambria Math" panose="02040503050406030204" pitchFamily="18" charset="0"/>
                             </a:rPr>
                             <m:t>∗</m:t>
@@ -3598,7 +3600,7 @@
               </p:txBody>
             </p:sp>
           </mc:Choice>
-          <mc:Fallback>
+          <mc:Fallback xmlns="">
             <p:sp>
               <p:nvSpPr>
                 <p:cNvPr id="31" name="文字方塊 30">
@@ -3643,48 +3645,48 @@
             </p:sp>
           </mc:Fallback>
         </mc:AlternateContent>
-        <p:pic>
-          <p:nvPicPr>
-            <p:cNvPr id="2" name="圖片 1">
-              <a:extLst>
-                <a:ext uri="{FF2B5EF4-FFF2-40B4-BE49-F238E27FC236}">
-                  <a16:creationId xmlns:a16="http://schemas.microsoft.com/office/drawing/2014/main" id="{C35CF743-E83E-485D-9734-AD5D0AA2BF5A}"/>
-                </a:ext>
-              </a:extLst>
-            </p:cNvPr>
-            <p:cNvPicPr>
-              <a:picLocks noChangeAspect="1"/>
-            </p:cNvPicPr>
-            <p:nvPr/>
-          </p:nvPicPr>
-          <p:blipFill>
-            <a:blip r:embed="rId7">
-              <a:clrChange>
-                <a:clrFrom>
-                  <a:srgbClr val="FFFFFF"/>
-                </a:clrFrom>
-                <a:clrTo>
-                  <a:srgbClr val="FFFFFF">
-                    <a:alpha val="0"/>
-                  </a:srgbClr>
-                </a:clrTo>
-              </a:clrChange>
-            </a:blip>
-            <a:stretch>
-              <a:fillRect/>
-            </a:stretch>
-          </p:blipFill>
-          <p:spPr>
-            <a:xfrm rot="16200000">
-              <a:off x="-458896" y="2469534"/>
-              <a:ext cx="1447474" cy="388537"/>
-            </a:xfrm>
-            <a:prstGeom prst="rect">
-              <a:avLst/>
-            </a:prstGeom>
-          </p:spPr>
-        </p:pic>
       </p:grpSp>
+      <p:pic>
+        <p:nvPicPr>
+          <p:cNvPr id="4" name="圖片 3">
+            <a:extLst>
+              <a:ext uri="{FF2B5EF4-FFF2-40B4-BE49-F238E27FC236}">
+                <a16:creationId xmlns:a16="http://schemas.microsoft.com/office/drawing/2014/main" id="{7C0D2864-326B-45C2-90AD-B7A008FA97B3}"/>
+              </a:ext>
+            </a:extLst>
+          </p:cNvPr>
+          <p:cNvPicPr>
+            <a:picLocks noChangeAspect="1"/>
+          </p:cNvPicPr>
+          <p:nvPr/>
+        </p:nvPicPr>
+        <p:blipFill>
+          <a:blip r:embed="rId7">
+            <a:clrChange>
+              <a:clrFrom>
+                <a:srgbClr val="FFFFFF"/>
+              </a:clrFrom>
+              <a:clrTo>
+                <a:srgbClr val="FFFFFF">
+                  <a:alpha val="0"/>
+                </a:srgbClr>
+              </a:clrTo>
+            </a:clrChange>
+          </a:blip>
+          <a:stretch>
+            <a:fillRect/>
+          </a:stretch>
+        </p:blipFill>
+        <p:spPr>
+          <a:xfrm rot="16200000">
+            <a:off x="-605378" y="1901104"/>
+            <a:ext cx="1663063" cy="504559"/>
+          </a:xfrm>
+          <a:prstGeom prst="rect">
+            <a:avLst/>
+          </a:prstGeom>
+        </p:spPr>
+      </p:pic>
     </p:spTree>
     <p:extLst>
       <p:ext uri="{BB962C8B-B14F-4D97-AF65-F5344CB8AC3E}">
